--- a/Unterrichtsmaterial_Oberschule_Sachsen/Klasse_8/04_Netzwerke_in_der_Informatik/05_Praesentationen/01_10_Netzwerke.pptx
+++ b/Unterrichtsmaterial_Oberschule_Sachsen/Klasse_8/04_Netzwerke_in_der_Informatik/05_Praesentationen/01_10_Netzwerke.pptx
@@ -14,11 +14,6 @@
     <p:sldId id="262" r:id="rId14"/>
     <p:sldId id="263" r:id="rId15"/>
     <p:sldId id="264" r:id="rId16"/>
-    <p:sldId id="265" r:id="rId17"/>
-    <p:sldId id="266" r:id="rId18"/>
-    <p:sldId id="267" r:id="rId19"/>
-    <p:sldId id="268" r:id="rId20"/>
-    <p:sldId id="269" r:id="rId21"/>
   </p:sldIdLst>
   <p:sldSz cx="12191695" cy="6858000" type="screen4x3"/>
   <p:notesSz cx="6858000" cy="9144000"/>
@@ -515,357 +510,7 @@
           <a:lstStyle/>
           <a:p>
             <a:r>
-              <a:t>Lehrplanbezug: https://www.schulportal.sachsen.de/lplandb/lehrplan/514</a:t>
-            </a:r>
-          </a:p>
-        </p:txBody>
-      </p:sp>
-      <p:sp>
-        <p:nvSpPr>
-          <p:cNvPr id="4" name="Slide Number Placeholder 3"/>
-          <p:cNvSpPr>
-            <a:spLocks noGrp="1"/>
-          </p:cNvSpPr>
-          <p:nvPr>
-            <p:ph type="sldNum" idx="5" sz="quarter"/>
-          </p:nvPr>
-        </p:nvSpPr>
-        <p:spPr/>
-      </p:sp>
-    </p:spTree>
-  </p:cSld>
-  <p:clrMapOvr>
-    <a:masterClrMapping/>
-  </p:clrMapOvr>
-</p:notes>
-</file>
-
-<file path=ppt/notesSlides/notesSlide10.xml><?xml version="1.0" encoding="utf-8"?>
-<p:notes xmlns:a="http://schemas.openxmlformats.org/drawingml/2006/main" xmlns:p="http://schemas.openxmlformats.org/presentationml/2006/main" xmlns:r="http://schemas.openxmlformats.org/officeDocument/2006/relationships">
-  <p:cSld>
-    <p:spTree>
-      <p:nvGrpSpPr>
-        <p:cNvPr id="1" name=""/>
-        <p:cNvGrpSpPr/>
-        <p:nvPr/>
-      </p:nvGrpSpPr>
-      <p:grpSpPr>
-        <a:xfrm>
-          <a:off x="0" y="0"/>
-          <a:ext cx="0" cy="0"/>
-          <a:chOff x="0" y="0"/>
-          <a:chExt cx="0" cy="0"/>
-        </a:xfrm>
-      </p:grpSpPr>
-      <p:sp>
-        <p:nvSpPr>
-          <p:cNvPr id="2" name="Slide Image Placeholder 1"/>
-          <p:cNvSpPr>
-            <a:spLocks noGrp="1"/>
-          </p:cNvSpPr>
-          <p:nvPr>
-            <p:ph type="sldImg" idx="2"/>
-          </p:nvPr>
-        </p:nvSpPr>
-        <p:spPr/>
-      </p:sp>
-      <p:sp>
-        <p:nvSpPr>
-          <p:cNvPr id="3" name="Notes Placeholder 2"/>
-          <p:cNvSpPr>
-            <a:spLocks noGrp="1"/>
-          </p:cNvSpPr>
-          <p:nvPr>
-            <p:ph type="body" idx="3" sz="quarter"/>
-          </p:nvPr>
-        </p:nvSpPr>
-        <p:spPr/>
-        <p:txBody>
-          <a:bodyPr/>
-          <a:lstStyle/>
-          <a:p>
-            <a:r>
-              <a:t>Definition vor Beispielen. Browser=Programm, WWW=Netzwerkdienst, Webserver=System/Rolle.</a:t>
-            </a:r>
-          </a:p>
-        </p:txBody>
-      </p:sp>
-      <p:sp>
-        <p:nvSpPr>
-          <p:cNvPr id="4" name="Slide Number Placeholder 3"/>
-          <p:cNvSpPr>
-            <a:spLocks noGrp="1"/>
-          </p:cNvSpPr>
-          <p:nvPr>
-            <p:ph type="sldNum" idx="5" sz="quarter"/>
-          </p:nvPr>
-        </p:nvSpPr>
-        <p:spPr/>
-      </p:sp>
-    </p:spTree>
-  </p:cSld>
-  <p:clrMapOvr>
-    <a:masterClrMapping/>
-  </p:clrMapOvr>
-</p:notes>
-</file>
-
-<file path=ppt/notesSlides/notesSlide11.xml><?xml version="1.0" encoding="utf-8"?>
-<p:notes xmlns:a="http://schemas.openxmlformats.org/drawingml/2006/main" xmlns:p="http://schemas.openxmlformats.org/presentationml/2006/main" xmlns:r="http://schemas.openxmlformats.org/officeDocument/2006/relationships">
-  <p:cSld>
-    <p:spTree>
-      <p:nvGrpSpPr>
-        <p:cNvPr id="1" name=""/>
-        <p:cNvGrpSpPr/>
-        <p:nvPr/>
-      </p:nvGrpSpPr>
-      <p:grpSpPr>
-        <a:xfrm>
-          <a:off x="0" y="0"/>
-          <a:ext cx="0" cy="0"/>
-          <a:chOff x="0" y="0"/>
-          <a:chExt cx="0" cy="0"/>
-        </a:xfrm>
-      </p:grpSpPr>
-      <p:sp>
-        <p:nvSpPr>
-          <p:cNvPr id="2" name="Slide Image Placeholder 1"/>
-          <p:cNvSpPr>
-            <a:spLocks noGrp="1"/>
-          </p:cNvSpPr>
-          <p:nvPr>
-            <p:ph type="sldImg" idx="2"/>
-          </p:nvPr>
-        </p:nvSpPr>
-        <p:spPr/>
-      </p:sp>
-      <p:sp>
-        <p:nvSpPr>
-          <p:cNvPr id="3" name="Notes Placeholder 2"/>
-          <p:cNvSpPr>
-            <a:spLocks noGrp="1"/>
-          </p:cNvSpPr>
-          <p:nvPr>
-            <p:ph type="body" idx="3" sz="quarter"/>
-          </p:nvPr>
-        </p:nvSpPr>
-        <p:spPr/>
-        <p:txBody>
-          <a:bodyPr/>
-          <a:lstStyle/>
-          <a:p>
-            <a:r>
-              <a:t>Von Alltagssituation zum Dienst gehen. Keine bloße Begriffsliste.</a:t>
-            </a:r>
-          </a:p>
-        </p:txBody>
-      </p:sp>
-      <p:sp>
-        <p:nvSpPr>
-          <p:cNvPr id="4" name="Slide Number Placeholder 3"/>
-          <p:cNvSpPr>
-            <a:spLocks noGrp="1"/>
-          </p:cNvSpPr>
-          <p:nvPr>
-            <p:ph type="sldNum" idx="5" sz="quarter"/>
-          </p:nvPr>
-        </p:nvSpPr>
-        <p:spPr/>
-      </p:sp>
-    </p:spTree>
-  </p:cSld>
-  <p:clrMapOvr>
-    <a:masterClrMapping/>
-  </p:clrMapOvr>
-</p:notes>
-</file>
-
-<file path=ppt/notesSlides/notesSlide12.xml><?xml version="1.0" encoding="utf-8"?>
-<p:notes xmlns:a="http://schemas.openxmlformats.org/drawingml/2006/main" xmlns:p="http://schemas.openxmlformats.org/presentationml/2006/main" xmlns:r="http://schemas.openxmlformats.org/officeDocument/2006/relationships">
-  <p:cSld>
-    <p:spTree>
-      <p:nvGrpSpPr>
-        <p:cNvPr id="1" name=""/>
-        <p:cNvGrpSpPr/>
-        <p:nvPr/>
-      </p:nvGrpSpPr>
-      <p:grpSpPr>
-        <a:xfrm>
-          <a:off x="0" y="0"/>
-          <a:ext cx="0" cy="0"/>
-          <a:chOff x="0" y="0"/>
-          <a:chExt cx="0" cy="0"/>
-        </a:xfrm>
-      </p:grpSpPr>
-      <p:sp>
-        <p:nvSpPr>
-          <p:cNvPr id="2" name="Slide Image Placeholder 1"/>
-          <p:cNvSpPr>
-            <a:spLocks noGrp="1"/>
-          </p:cNvSpPr>
-          <p:nvPr>
-            <p:ph type="sldImg" idx="2"/>
-          </p:nvPr>
-        </p:nvSpPr>
-        <p:spPr/>
-      </p:sp>
-      <p:sp>
-        <p:nvSpPr>
-          <p:cNvPr id="3" name="Notes Placeholder 2"/>
-          <p:cNvSpPr>
-            <a:spLocks noGrp="1"/>
-          </p:cNvSpPr>
-          <p:nvPr>
-            <p:ph type="body" idx="3" sz="quarter"/>
-          </p:nvPr>
-        </p:nvSpPr>
-        <p:spPr/>
-        <p:txBody>
-          <a:bodyPr/>
-          <a:lstStyle/>
-          <a:p>
-            <a:r>
-              <a:t>Praktische Diagnose. ping nur zu vorgegebenen Testzielen einsetzen. Ein fehlgeschlagener Ping beweist nicht zwingend Unerreichbarkeit, da Antworten blockiert werden können.</a:t>
-            </a:r>
-          </a:p>
-        </p:txBody>
-      </p:sp>
-      <p:sp>
-        <p:nvSpPr>
-          <p:cNvPr id="4" name="Slide Number Placeholder 3"/>
-          <p:cNvSpPr>
-            <a:spLocks noGrp="1"/>
-          </p:cNvSpPr>
-          <p:nvPr>
-            <p:ph type="sldNum" idx="5" sz="quarter"/>
-          </p:nvPr>
-        </p:nvSpPr>
-        <p:spPr/>
-      </p:sp>
-    </p:spTree>
-  </p:cSld>
-  <p:clrMapOvr>
-    <a:masterClrMapping/>
-  </p:clrMapOvr>
-</p:notes>
-</file>
-
-<file path=ppt/notesSlides/notesSlide13.xml><?xml version="1.0" encoding="utf-8"?>
-<p:notes xmlns:a="http://schemas.openxmlformats.org/drawingml/2006/main" xmlns:p="http://schemas.openxmlformats.org/presentationml/2006/main" xmlns:r="http://schemas.openxmlformats.org/officeDocument/2006/relationships">
-  <p:cSld>
-    <p:spTree>
-      <p:nvGrpSpPr>
-        <p:cNvPr id="1" name=""/>
-        <p:cNvGrpSpPr/>
-        <p:nvPr/>
-      </p:nvGrpSpPr>
-      <p:grpSpPr>
-        <a:xfrm>
-          <a:off x="0" y="0"/>
-          <a:ext cx="0" cy="0"/>
-          <a:chOff x="0" y="0"/>
-          <a:chExt cx="0" cy="0"/>
-        </a:xfrm>
-      </p:grpSpPr>
-      <p:sp>
-        <p:nvSpPr>
-          <p:cNvPr id="2" name="Slide Image Placeholder 1"/>
-          <p:cNvSpPr>
-            <a:spLocks noGrp="1"/>
-          </p:cNvSpPr>
-          <p:nvPr>
-            <p:ph type="sldImg" idx="2"/>
-          </p:nvPr>
-        </p:nvSpPr>
-        <p:spPr/>
-      </p:sp>
-      <p:sp>
-        <p:nvSpPr>
-          <p:cNvPr id="3" name="Notes Placeholder 2"/>
-          <p:cNvSpPr>
-            <a:spLocks noGrp="1"/>
-          </p:cNvSpPr>
-          <p:nvPr>
-            <p:ph type="body" idx="3" sz="quarter"/>
-          </p:nvPr>
-        </p:nvSpPr>
-        <p:spPr/>
-        <p:txBody>
-          <a:bodyPr/>
-          <a:lstStyle/>
-          <a:p>
-            <a:r>
-              <a:t>Sicherungsfolie bewusst ohne große überlagernde Grafik. Antworten mündlich oder als Exit-Ticket.</a:t>
-            </a:r>
-          </a:p>
-        </p:txBody>
-      </p:sp>
-      <p:sp>
-        <p:nvSpPr>
-          <p:cNvPr id="4" name="Slide Number Placeholder 3"/>
-          <p:cNvSpPr>
-            <a:spLocks noGrp="1"/>
-          </p:cNvSpPr>
-          <p:nvPr>
-            <p:ph type="sldNum" idx="5" sz="quarter"/>
-          </p:nvPr>
-        </p:nvSpPr>
-        <p:spPr/>
-      </p:sp>
-    </p:spTree>
-  </p:cSld>
-  <p:clrMapOvr>
-    <a:masterClrMapping/>
-  </p:clrMapOvr>
-</p:notes>
-</file>
-
-<file path=ppt/notesSlides/notesSlide14.xml><?xml version="1.0" encoding="utf-8"?>
-<p:notes xmlns:a="http://schemas.openxmlformats.org/drawingml/2006/main" xmlns:p="http://schemas.openxmlformats.org/presentationml/2006/main" xmlns:r="http://schemas.openxmlformats.org/officeDocument/2006/relationships">
-  <p:cSld>
-    <p:spTree>
-      <p:nvGrpSpPr>
-        <p:cNvPr id="1" name=""/>
-        <p:cNvGrpSpPr/>
-        <p:nvPr/>
-      </p:nvGrpSpPr>
-      <p:grpSpPr>
-        <a:xfrm>
-          <a:off x="0" y="0"/>
-          <a:ext cx="0" cy="0"/>
-          <a:chOff x="0" y="0"/>
-          <a:chExt cx="0" cy="0"/>
-        </a:xfrm>
-      </p:grpSpPr>
-      <p:sp>
-        <p:nvSpPr>
-          <p:cNvPr id="2" name="Slide Image Placeholder 1"/>
-          <p:cNvSpPr>
-            <a:spLocks noGrp="1"/>
-          </p:cNvSpPr>
-          <p:nvPr>
-            <p:ph type="sldImg" idx="2"/>
-          </p:nvPr>
-        </p:nvSpPr>
-        <p:spPr/>
-      </p:sp>
-      <p:sp>
-        <p:nvSpPr>
-          <p:cNvPr id="3" name="Notes Placeholder 2"/>
-          <p:cNvSpPr>
-            <a:spLocks noGrp="1"/>
-          </p:cNvSpPr>
-          <p:nvPr>
-            <p:ph type="body" idx="3" sz="quarter"/>
-          </p:nvPr>
-        </p:nvSpPr>
-        <p:spPr/>
-        <p:txBody>
-          <a:bodyPr/>
-          <a:lstStyle/>
-          <a:p>
-            <a:r>
-              <a:t>Quellenfolie. Keine internen Repository-, Branch- oder Markdown-Verweise in der Schülerpräsentation.</a:t>
+              <a:t>Pflichtpräsentation ohne Kryptografie. Lehrplan: https://www.schulportal.sachsen.de/lplandb/lehrplan/514</a:t>
             </a:r>
           </a:p>
         </p:txBody>
@@ -935,7 +580,7 @@
           <a:lstStyle/>
           <a:p>
             <a:r>
-              <a:t>Leitfragenkasten bleibt frei; Netzwerkdiagramm darunter. Keine Kryptografie in dieser Pflichtpräsentation.</a:t>
+              <a:t>Grafik nicht über Leitfrage legen.</a:t>
             </a:r>
           </a:p>
         </p:txBody>
@@ -1005,7 +650,7 @@
           <a:lstStyle/>
           <a:p>
             <a:r>
-              <a:t>Bei null beginnen. Erst Alltagssituationen, dann Fachbegriffe.</a:t>
+              <a:t>Abkürzungen ausschreiben, bevor sie benutzt werden.</a:t>
             </a:r>
           </a:p>
         </p:txBody>
@@ -1075,7 +720,7 @@
           <a:lstStyle/>
           <a:p>
             <a:r>
-              <a:t>Abkürzungen bei erster Verwendung ausschreiben. Typische Fehlvorstellung WLAN=Internet explizit bearbeiten.</a:t>
+              <a:t>Begriffe mit Rolle erklären, nicht nur nennen.</a:t>
             </a:r>
           </a:p>
         </p:txBody>
@@ -1145,7 +790,7 @@
           <a:lstStyle/>
           <a:p>
             <a:r>
-              <a:t>Begriffe jeweils mit Rolle und Alltagssituation erklären. Keine Abkürzungen ohne Einführung.</a:t>
+              <a:t>DNS nicht als Dynamic Name Service erklären.</a:t>
             </a:r>
           </a:p>
         </p:txBody>
@@ -1215,7 +860,7 @@
           <a:lstStyle/>
           <a:p>
             <a:r>
-              <a:t>DNS zuerst ausschreiben und erklären. Telefonbuch-Analogie nur als Vereinfachung verwenden.</a:t>
+              <a:t>Jede Abkürzung ausgeschrieben erläutern.</a:t>
             </a:r>
           </a:p>
         </p:txBody>
@@ -1285,7 +930,7 @@
           <a:lstStyle/>
           <a:p>
             <a:r>
-              <a:t>Nur konzeptionell vergleichen; keine unnötige Physikvertiefung.</a:t>
+              <a:t>Ping nur mit vorgegebenem Testziel; Fehlschlag ist kein endgültiger Beweis.</a:t>
             </a:r>
           </a:p>
         </p:txBody>
@@ -1355,7 +1000,7 @@
           <a:lstStyle/>
           <a:p>
             <a:r>
-              <a:t>Gesprächsregeln als Analogie. Begriff vor Abkürzungen einführen.</a:t>
+              <a:t>Sicherung ohne überlappende Grafik.</a:t>
             </a:r>
           </a:p>
         </p:txBody>
@@ -1425,7 +1070,7 @@
           <a:lstStyle/>
           <a:p>
             <a:r>
-              <a:t>Nicht zu viele Abkürzungen auf einmal abfragen. Zuordnung an Alltagssituationen üben. SFTP nicht als bloß 'sicheres FTP' erklären.</a:t>
+              <a:t>Quellenfolie. Quellenangaben sind für Lehrkraft/Weiterverwendung sichtbar.</a:t>
             </a:r>
           </a:p>
         </p:txBody>
@@ -4446,7 +4091,7 @@
             <a:avLst/>
           </a:prstGeom>
           <a:solidFill>
-            <a:srgbClr val="1F374E"/>
+            <a:srgbClr val="202C3C"/>
           </a:solidFill>
           <a:ln>
             <a:noFill/>
@@ -4482,8 +4127,8 @@
         </p:nvSpPr>
         <p:spPr>
           <a:xfrm>
-            <a:off x="731520" y="1417320"/>
-            <a:ext cx="10698480" cy="1188720"/>
+            <a:off x="731520" y="1554480"/>
+            <a:ext cx="10789920" cy="1097280"/>
           </a:xfrm>
           <a:prstGeom prst="rect">
             <a:avLst/>
@@ -4515,8 +4160,8 @@
         </p:nvSpPr>
         <p:spPr>
           <a:xfrm>
-            <a:off x="777240" y="2971800"/>
-            <a:ext cx="10515600" cy="731520"/>
+            <a:off x="777240" y="3017520"/>
+            <a:ext cx="10515600" cy="640080"/>
           </a:xfrm>
           <a:prstGeom prst="rect">
             <a:avLst/>
@@ -4535,1786 +4180,7 @@
                   <a:srgbClr val="FFFFFF"/>
                 </a:solidFill>
               </a:rPr>
-              <a:t>Klasse 8 · Lernbereich 2</a:t>
-            </a:r>
-          </a:p>
-        </p:txBody>
-      </p:sp>
-    </p:spTree>
-  </p:cSld>
-  <p:clrMapOvr>
-    <a:masterClrMapping/>
-  </p:clrMapOvr>
-</p:sld>
-</file>
-
-<file path=ppt/slides/slide10.xml><?xml version="1.0" encoding="utf-8"?>
-<p:sld xmlns:a="http://schemas.openxmlformats.org/drawingml/2006/main" xmlns:p="http://schemas.openxmlformats.org/presentationml/2006/main" xmlns:r="http://schemas.openxmlformats.org/officeDocument/2006/relationships">
-  <p:cSld>
-    <p:spTree>
-      <p:nvGrpSpPr>
-        <p:cNvPr id="1" name=""/>
-        <p:cNvGrpSpPr/>
-        <p:nvPr/>
-      </p:nvGrpSpPr>
-      <p:grpSpPr/>
-      <p:sp>
-        <p:nvSpPr>
-          <p:cNvPr id="2" name="Rectangle 1"/>
-          <p:cNvSpPr/>
-          <p:nvPr/>
-        </p:nvSpPr>
-        <p:spPr>
-          <a:xfrm>
-            <a:off x="0" y="0"/>
-            <a:ext cx="12191695" cy="100584"/>
-          </a:xfrm>
-          <a:prstGeom prst="rect">
-            <a:avLst/>
-          </a:prstGeom>
-          <a:solidFill>
-            <a:srgbClr val="4472C4"/>
-          </a:solidFill>
-          <a:ln>
-            <a:noFill/>
-          </a:ln>
-        </p:spPr>
-        <p:style>
-          <a:lnRef idx="1">
-            <a:schemeClr val="accent1"/>
-          </a:lnRef>
-          <a:fillRef idx="3">
-            <a:schemeClr val="accent1"/>
-          </a:fillRef>
-          <a:effectRef idx="2">
-            <a:schemeClr val="accent1"/>
-          </a:effectRef>
-          <a:fontRef idx="minor">
-            <a:schemeClr val="lt1"/>
-          </a:fontRef>
-        </p:style>
-        <p:txBody>
-          <a:bodyPr rtlCol="0" anchor="ctr"/>
-          <a:lstStyle/>
-          <a:p>
-            <a:pPr algn="ctr"/>
-          </a:p>
-        </p:txBody>
-      </p:sp>
-      <p:sp>
-        <p:nvSpPr>
-          <p:cNvPr id="3" name="TextBox 2"/>
-          <p:cNvSpPr txBox="1"/>
-          <p:nvPr/>
-        </p:nvSpPr>
-        <p:spPr>
-          <a:xfrm>
-            <a:off x="594360" y="320040"/>
-            <a:ext cx="10972800" cy="502920"/>
-          </a:xfrm>
-          <a:prstGeom prst="rect">
-            <a:avLst/>
-          </a:prstGeom>
-          <a:noFill/>
-        </p:spPr>
-        <p:txBody>
-          <a:bodyPr wrap="none">
-            <a:spAutoFit/>
-          </a:bodyPr>
-          <a:lstStyle/>
-          <a:p>
-            <a:r>
-              <a:rPr sz="2600" b="1">
-                <a:solidFill>
-                  <a:srgbClr val="1F374E"/>
-                </a:solidFill>
-              </a:rPr>
-              <a:t>Was ist ein Netzwerkdienst?</a:t>
-            </a:r>
-          </a:p>
-        </p:txBody>
-      </p:sp>
-      <p:sp>
-        <p:nvSpPr>
-          <p:cNvPr id="4" name="TextBox 3"/>
-          <p:cNvSpPr txBox="1"/>
-          <p:nvPr/>
-        </p:nvSpPr>
-        <p:spPr>
-          <a:xfrm>
-            <a:off x="685800" y="1234440"/>
-            <a:ext cx="5303520" cy="4937760"/>
-          </a:xfrm>
-          <a:prstGeom prst="rect">
-            <a:avLst/>
-          </a:prstGeom>
-          <a:noFill/>
-        </p:spPr>
-        <p:txBody>
-          <a:bodyPr wrap="square">
-            <a:spAutoFit/>
-          </a:bodyPr>
-          <a:lstStyle/>
-          <a:p>
-            <a:pPr>
-              <a:spcAft>
-                <a:spcPts val="800"/>
-              </a:spcAft>
-              <a:defRPr sz="1900">
-                <a:solidFill>
-                  <a:srgbClr val="232323"/>
-                </a:solidFill>
-              </a:defRPr>
-            </a:pPr>
-            <a:r>
-              <a:t>Ein Netzwerkdienst stellt über ein Netzwerk eine bestimmte Funktion bereit.</a:t>
-            </a:r>
-          </a:p>
-          <a:p>
-            <a:pPr>
-              <a:spcAft>
-                <a:spcPts val="800"/>
-              </a:spcAft>
-              <a:defRPr sz="1900">
-                <a:solidFill>
-                  <a:srgbClr val="232323"/>
-                </a:solidFill>
-              </a:defRPr>
-            </a:pPr>
-            <a:r>
-              <a:t>Andere Geräte oder Programme können diese Funktion nutzen.</a:t>
-            </a:r>
-          </a:p>
-          <a:p>
-            <a:pPr>
-              <a:spcAft>
-                <a:spcPts val="800"/>
-              </a:spcAft>
-              <a:defRPr sz="1900">
-                <a:solidFill>
-                  <a:srgbClr val="232323"/>
-                </a:solidFill>
-              </a:defRPr>
-            </a:pPr>
-            <a:r>
-              <a:t>Dienst, Programm und Gerät sind nicht dasselbe.</a:t>
-            </a:r>
-          </a:p>
-        </p:txBody>
-      </p:sp>
-      <p:sp>
-        <p:nvSpPr>
-          <p:cNvPr id="5" name="Rounded Rectangle 4"/>
-          <p:cNvSpPr/>
-          <p:nvPr/>
-        </p:nvSpPr>
-        <p:spPr>
-          <a:xfrm>
-            <a:off x="6217920" y="1645920"/>
-            <a:ext cx="1143000" cy="731520"/>
-          </a:xfrm>
-          <a:prstGeom prst="roundRect">
-            <a:avLst/>
-          </a:prstGeom>
-          <a:solidFill>
-            <a:srgbClr val="F2F6FA"/>
-          </a:solidFill>
-          <a:ln>
-            <a:solidFill>
-              <a:srgbClr val="4472C4"/>
-            </a:solidFill>
-          </a:ln>
-        </p:spPr>
-        <p:style>
-          <a:lnRef idx="1">
-            <a:schemeClr val="accent1"/>
-          </a:lnRef>
-          <a:fillRef idx="3">
-            <a:schemeClr val="accent1"/>
-          </a:fillRef>
-          <a:effectRef idx="2">
-            <a:schemeClr val="accent1"/>
-          </a:effectRef>
-          <a:fontRef idx="minor">
-            <a:schemeClr val="lt1"/>
-          </a:fontRef>
-        </p:style>
-        <p:txBody>
-          <a:bodyPr rtlCol="0" anchor="ctr" wrap="square"/>
-          <a:lstStyle/>
-          <a:p>
-            <a:pPr algn="ctr"/>
-            <a:r>
-              <a:rPr sz="1100" b="1">
-                <a:solidFill>
-                  <a:srgbClr val="1F374E"/>
-                </a:solidFill>
-              </a:rPr>
-              <a:t>Endgerät</a:t>
-            </a:r>
-          </a:p>
-        </p:txBody>
-      </p:sp>
-      <p:sp>
-        <p:nvSpPr>
-          <p:cNvPr id="6" name="Right Arrow 5"/>
-          <p:cNvSpPr/>
-          <p:nvPr/>
-        </p:nvSpPr>
-        <p:spPr>
-          <a:xfrm>
-            <a:off x="7406640" y="1847088"/>
-            <a:ext cx="274320" cy="256032"/>
-          </a:xfrm>
-          <a:prstGeom prst="rightArrow">
-            <a:avLst/>
-          </a:prstGeom>
-          <a:solidFill>
-            <a:srgbClr val="4472C4"/>
-          </a:solidFill>
-          <a:ln>
-            <a:noFill/>
-          </a:ln>
-        </p:spPr>
-        <p:style>
-          <a:lnRef idx="1">
-            <a:schemeClr val="accent1"/>
-          </a:lnRef>
-          <a:fillRef idx="3">
-            <a:schemeClr val="accent1"/>
-          </a:fillRef>
-          <a:effectRef idx="2">
-            <a:schemeClr val="accent1"/>
-          </a:effectRef>
-          <a:fontRef idx="minor">
-            <a:schemeClr val="lt1"/>
-          </a:fontRef>
-        </p:style>
-        <p:txBody>
-          <a:bodyPr rtlCol="0" anchor="ctr"/>
-          <a:lstStyle/>
-          <a:p>
-            <a:pPr algn="ctr"/>
-          </a:p>
-        </p:txBody>
-      </p:sp>
-      <p:sp>
-        <p:nvSpPr>
-          <p:cNvPr id="7" name="Rounded Rectangle 6"/>
-          <p:cNvSpPr/>
-          <p:nvPr/>
-        </p:nvSpPr>
-        <p:spPr>
-          <a:xfrm>
-            <a:off x="7635240" y="1645920"/>
-            <a:ext cx="1508760" cy="731520"/>
-          </a:xfrm>
-          <a:prstGeom prst="roundRect">
-            <a:avLst/>
-          </a:prstGeom>
-          <a:solidFill>
-            <a:srgbClr val="DCE6F1"/>
-          </a:solidFill>
-          <a:ln>
-            <a:solidFill>
-              <a:srgbClr val="4472C4"/>
-            </a:solidFill>
-          </a:ln>
-        </p:spPr>
-        <p:style>
-          <a:lnRef idx="1">
-            <a:schemeClr val="accent1"/>
-          </a:lnRef>
-          <a:fillRef idx="3">
-            <a:schemeClr val="accent1"/>
-          </a:fillRef>
-          <a:effectRef idx="2">
-            <a:schemeClr val="accent1"/>
-          </a:effectRef>
-          <a:fontRef idx="minor">
-            <a:schemeClr val="lt1"/>
-          </a:fontRef>
-        </p:style>
-        <p:txBody>
-          <a:bodyPr rtlCol="0" anchor="ctr" wrap="square"/>
-          <a:lstStyle/>
-          <a:p>
-            <a:pPr algn="ctr"/>
-            <a:r>
-              <a:rPr sz="1100" b="1">
-                <a:solidFill>
-                  <a:srgbClr val="1F374E"/>
-                </a:solidFill>
-              </a:rPr>
-              <a:t>Switch / Access Point</a:t>
-            </a:r>
-          </a:p>
-        </p:txBody>
-      </p:sp>
-      <p:sp>
-        <p:nvSpPr>
-          <p:cNvPr id="8" name="Right Arrow 7"/>
-          <p:cNvSpPr/>
-          <p:nvPr/>
-        </p:nvSpPr>
-        <p:spPr>
-          <a:xfrm>
-            <a:off x="9189720" y="1847088"/>
-            <a:ext cx="274320" cy="256032"/>
-          </a:xfrm>
-          <a:prstGeom prst="rightArrow">
-            <a:avLst/>
-          </a:prstGeom>
-          <a:solidFill>
-            <a:srgbClr val="4472C4"/>
-          </a:solidFill>
-          <a:ln>
-            <a:noFill/>
-          </a:ln>
-        </p:spPr>
-        <p:style>
-          <a:lnRef idx="1">
-            <a:schemeClr val="accent1"/>
-          </a:lnRef>
-          <a:fillRef idx="3">
-            <a:schemeClr val="accent1"/>
-          </a:fillRef>
-          <a:effectRef idx="2">
-            <a:schemeClr val="accent1"/>
-          </a:effectRef>
-          <a:fontRef idx="minor">
-            <a:schemeClr val="lt1"/>
-          </a:fontRef>
-        </p:style>
-        <p:txBody>
-          <a:bodyPr rtlCol="0" anchor="ctr"/>
-          <a:lstStyle/>
-          <a:p>
-            <a:pPr algn="ctr"/>
-          </a:p>
-        </p:txBody>
-      </p:sp>
-      <p:sp>
-        <p:nvSpPr>
-          <p:cNvPr id="9" name="Rounded Rectangle 8"/>
-          <p:cNvSpPr/>
-          <p:nvPr/>
-        </p:nvSpPr>
-        <p:spPr>
-          <a:xfrm>
-            <a:off x="9372600" y="1645920"/>
-            <a:ext cx="1051560" cy="731520"/>
-          </a:xfrm>
-          <a:prstGeom prst="roundRect">
-            <a:avLst/>
-          </a:prstGeom>
-          <a:solidFill>
-            <a:srgbClr val="FFE699"/>
-          </a:solidFill>
-          <a:ln>
-            <a:solidFill>
-              <a:srgbClr val="4472C4"/>
-            </a:solidFill>
-          </a:ln>
-        </p:spPr>
-        <p:style>
-          <a:lnRef idx="1">
-            <a:schemeClr val="accent1"/>
-          </a:lnRef>
-          <a:fillRef idx="3">
-            <a:schemeClr val="accent1"/>
-          </a:fillRef>
-          <a:effectRef idx="2">
-            <a:schemeClr val="accent1"/>
-          </a:effectRef>
-          <a:fontRef idx="minor">
-            <a:schemeClr val="lt1"/>
-          </a:fontRef>
-        </p:style>
-        <p:txBody>
-          <a:bodyPr rtlCol="0" anchor="ctr" wrap="square"/>
-          <a:lstStyle/>
-          <a:p>
-            <a:pPr algn="ctr"/>
-            <a:r>
-              <a:rPr sz="1100" b="1">
-                <a:solidFill>
-                  <a:srgbClr val="1F374E"/>
-                </a:solidFill>
-              </a:rPr>
-              <a:t>Router</a:t>
-            </a:r>
-          </a:p>
-        </p:txBody>
-      </p:sp>
-      <p:sp>
-        <p:nvSpPr>
-          <p:cNvPr id="10" name="Right Arrow 9"/>
-          <p:cNvSpPr/>
-          <p:nvPr/>
-        </p:nvSpPr>
-        <p:spPr>
-          <a:xfrm>
-            <a:off x="10469880" y="1847088"/>
-            <a:ext cx="274320" cy="256032"/>
-          </a:xfrm>
-          <a:prstGeom prst="rightArrow">
-            <a:avLst/>
-          </a:prstGeom>
-          <a:solidFill>
-            <a:srgbClr val="4472C4"/>
-          </a:solidFill>
-          <a:ln>
-            <a:noFill/>
-          </a:ln>
-        </p:spPr>
-        <p:style>
-          <a:lnRef idx="1">
-            <a:schemeClr val="accent1"/>
-          </a:lnRef>
-          <a:fillRef idx="3">
-            <a:schemeClr val="accent1"/>
-          </a:fillRef>
-          <a:effectRef idx="2">
-            <a:schemeClr val="accent1"/>
-          </a:effectRef>
-          <a:fontRef idx="minor">
-            <a:schemeClr val="lt1"/>
-          </a:fontRef>
-        </p:style>
-        <p:txBody>
-          <a:bodyPr rtlCol="0" anchor="ctr"/>
-          <a:lstStyle/>
-          <a:p>
-            <a:pPr algn="ctr"/>
-          </a:p>
-        </p:txBody>
-      </p:sp>
-      <p:sp>
-        <p:nvSpPr>
-          <p:cNvPr id="11" name="Rounded Rectangle 10"/>
-          <p:cNvSpPr/>
-          <p:nvPr/>
-        </p:nvSpPr>
-        <p:spPr>
-          <a:xfrm>
-            <a:off x="10698480" y="1645920"/>
-            <a:ext cx="1005840" cy="731520"/>
-          </a:xfrm>
-          <a:prstGeom prst="roundRect">
-            <a:avLst/>
-          </a:prstGeom>
-          <a:solidFill>
-            <a:srgbClr val="E2EFDA"/>
-          </a:solidFill>
-          <a:ln>
-            <a:solidFill>
-              <a:srgbClr val="4472C4"/>
-            </a:solidFill>
-          </a:ln>
-        </p:spPr>
-        <p:style>
-          <a:lnRef idx="1">
-            <a:schemeClr val="accent1"/>
-          </a:lnRef>
-          <a:fillRef idx="3">
-            <a:schemeClr val="accent1"/>
-          </a:fillRef>
-          <a:effectRef idx="2">
-            <a:schemeClr val="accent1"/>
-          </a:effectRef>
-          <a:fontRef idx="minor">
-            <a:schemeClr val="lt1"/>
-          </a:fontRef>
-        </p:style>
-        <p:txBody>
-          <a:bodyPr rtlCol="0" anchor="ctr" wrap="square"/>
-          <a:lstStyle/>
-          <a:p>
-            <a:pPr algn="ctr"/>
-            <a:r>
-              <a:rPr sz="1100" b="1">
-                <a:solidFill>
-                  <a:srgbClr val="1F374E"/>
-                </a:solidFill>
-              </a:rPr>
-              <a:t>Server</a:t>
-            </a:r>
-          </a:p>
-        </p:txBody>
-      </p:sp>
-      <p:sp>
-        <p:nvSpPr>
-          <p:cNvPr id="12" name="TextBox 11"/>
-          <p:cNvSpPr txBox="1"/>
-          <p:nvPr/>
-        </p:nvSpPr>
-        <p:spPr>
-          <a:xfrm>
-            <a:off x="502920" y="6510528"/>
-            <a:ext cx="11064240" cy="182880"/>
-          </a:xfrm>
-          <a:prstGeom prst="rect">
-            <a:avLst/>
-          </a:prstGeom>
-          <a:noFill/>
-        </p:spPr>
-        <p:txBody>
-          <a:bodyPr wrap="none">
-            <a:spAutoFit/>
-          </a:bodyPr>
-          <a:lstStyle/>
-          <a:p>
-            <a:pPr algn="r"/>
-            <a:r>
-              <a:rPr sz="800">
-                <a:solidFill>
-                  <a:srgbClr val="646464"/>
-                </a:solidFill>
-              </a:rPr>
-              <a:t>Grafik: eigene Darstellung</a:t>
-            </a:r>
-          </a:p>
-        </p:txBody>
-      </p:sp>
-    </p:spTree>
-  </p:cSld>
-  <p:clrMapOvr>
-    <a:masterClrMapping/>
-  </p:clrMapOvr>
-</p:sld>
-</file>
-
-<file path=ppt/slides/slide11.xml><?xml version="1.0" encoding="utf-8"?>
-<p:sld xmlns:a="http://schemas.openxmlformats.org/drawingml/2006/main" xmlns:p="http://schemas.openxmlformats.org/presentationml/2006/main" xmlns:r="http://schemas.openxmlformats.org/officeDocument/2006/relationships">
-  <p:cSld>
-    <p:spTree>
-      <p:nvGrpSpPr>
-        <p:cNvPr id="1" name=""/>
-        <p:cNvGrpSpPr/>
-        <p:nvPr/>
-      </p:nvGrpSpPr>
-      <p:grpSpPr/>
-      <p:sp>
-        <p:nvSpPr>
-          <p:cNvPr id="2" name="Rectangle 1"/>
-          <p:cNvSpPr/>
-          <p:nvPr/>
-        </p:nvSpPr>
-        <p:spPr>
-          <a:xfrm>
-            <a:off x="0" y="0"/>
-            <a:ext cx="12191695" cy="100584"/>
-          </a:xfrm>
-          <a:prstGeom prst="rect">
-            <a:avLst/>
-          </a:prstGeom>
-          <a:solidFill>
-            <a:srgbClr val="4472C4"/>
-          </a:solidFill>
-          <a:ln>
-            <a:noFill/>
-          </a:ln>
-        </p:spPr>
-        <p:style>
-          <a:lnRef idx="1">
-            <a:schemeClr val="accent1"/>
-          </a:lnRef>
-          <a:fillRef idx="3">
-            <a:schemeClr val="accent1"/>
-          </a:fillRef>
-          <a:effectRef idx="2">
-            <a:schemeClr val="accent1"/>
-          </a:effectRef>
-          <a:fontRef idx="minor">
-            <a:schemeClr val="lt1"/>
-          </a:fontRef>
-        </p:style>
-        <p:txBody>
-          <a:bodyPr rtlCol="0" anchor="ctr"/>
-          <a:lstStyle/>
-          <a:p>
-            <a:pPr algn="ctr"/>
-          </a:p>
-        </p:txBody>
-      </p:sp>
-      <p:sp>
-        <p:nvSpPr>
-          <p:cNvPr id="3" name="TextBox 2"/>
-          <p:cNvSpPr txBox="1"/>
-          <p:nvPr/>
-        </p:nvSpPr>
-        <p:spPr>
-          <a:xfrm>
-            <a:off x="594360" y="320040"/>
-            <a:ext cx="10972800" cy="502920"/>
-          </a:xfrm>
-          <a:prstGeom prst="rect">
-            <a:avLst/>
-          </a:prstGeom>
-          <a:noFill/>
-        </p:spPr>
-        <p:txBody>
-          <a:bodyPr wrap="none">
-            <a:spAutoFit/>
-          </a:bodyPr>
-          <a:lstStyle/>
-          <a:p>
-            <a:r>
-              <a:rPr sz="2600" b="1">
-                <a:solidFill>
-                  <a:srgbClr val="1F374E"/>
-                </a:solidFill>
-              </a:rPr>
-              <a:t>Dienste im Alltag</a:t>
-            </a:r>
-          </a:p>
-        </p:txBody>
-      </p:sp>
-      <p:sp>
-        <p:nvSpPr>
-          <p:cNvPr id="4" name="TextBox 3"/>
-          <p:cNvSpPr txBox="1"/>
-          <p:nvPr/>
-        </p:nvSpPr>
-        <p:spPr>
-          <a:xfrm>
-            <a:off x="685800" y="1234440"/>
-            <a:ext cx="5303520" cy="4937760"/>
-          </a:xfrm>
-          <a:prstGeom prst="rect">
-            <a:avLst/>
-          </a:prstGeom>
-          <a:noFill/>
-        </p:spPr>
-        <p:txBody>
-          <a:bodyPr wrap="square">
-            <a:spAutoFit/>
-          </a:bodyPr>
-          <a:lstStyle/>
-          <a:p>
-            <a:pPr>
-              <a:spcAft>
-                <a:spcPts val="800"/>
-              </a:spcAft>
-              <a:defRPr sz="1900">
-                <a:solidFill>
-                  <a:srgbClr val="232323"/>
-                </a:solidFill>
-              </a:defRPr>
-            </a:pPr>
-            <a:r>
-              <a:t>Webseite öffnen → World Wide Web (WWW): Webserver liefert Inhalte an den Browser.</a:t>
-            </a:r>
-          </a:p>
-          <a:p>
-            <a:pPr>
-              <a:spcAft>
-                <a:spcPts val="800"/>
-              </a:spcAft>
-              <a:defRPr sz="1900">
-                <a:solidFill>
-                  <a:srgbClr val="232323"/>
-                </a:solidFill>
-              </a:defRPr>
-            </a:pPr>
-            <a:r>
-              <a:t>E-Mail senden → E-Mail-Dienst: Mailserver nimmt Nachrichten an und leitet sie weiter.</a:t>
-            </a:r>
-          </a:p>
-          <a:p>
-            <a:pPr>
-              <a:spcAft>
-                <a:spcPts val="800"/>
-              </a:spcAft>
-              <a:defRPr sz="1900">
-                <a:solidFill>
-                  <a:srgbClr val="232323"/>
-                </a:solidFill>
-              </a:defRPr>
-            </a:pPr>
-            <a:r>
-              <a:t>Datei hochladen → Dateiübertragung: Daten werden auf ein anderes System übertragen.</a:t>
-            </a:r>
-          </a:p>
-          <a:p>
-            <a:pPr>
-              <a:spcAft>
-                <a:spcPts val="800"/>
-              </a:spcAft>
-              <a:defRPr sz="1900">
-                <a:solidFill>
-                  <a:srgbClr val="232323"/>
-                </a:solidFill>
-              </a:defRPr>
-            </a:pPr>
-            <a:r>
-              <a:t>Schulcloud nutzen → Cloud-Dienst: Dateien liegen auf entfernten Servern und können wieder abgerufen werden.</a:t>
-            </a:r>
-          </a:p>
-        </p:txBody>
-      </p:sp>
-      <p:sp>
-        <p:nvSpPr>
-          <p:cNvPr id="5" name="Rounded Rectangle 4"/>
-          <p:cNvSpPr/>
-          <p:nvPr/>
-        </p:nvSpPr>
-        <p:spPr>
-          <a:xfrm>
-            <a:off x="6217920" y="1645920"/>
-            <a:ext cx="1143000" cy="731520"/>
-          </a:xfrm>
-          <a:prstGeom prst="roundRect">
-            <a:avLst/>
-          </a:prstGeom>
-          <a:solidFill>
-            <a:srgbClr val="F2F6FA"/>
-          </a:solidFill>
-          <a:ln>
-            <a:solidFill>
-              <a:srgbClr val="4472C4"/>
-            </a:solidFill>
-          </a:ln>
-        </p:spPr>
-        <p:style>
-          <a:lnRef idx="1">
-            <a:schemeClr val="accent1"/>
-          </a:lnRef>
-          <a:fillRef idx="3">
-            <a:schemeClr val="accent1"/>
-          </a:fillRef>
-          <a:effectRef idx="2">
-            <a:schemeClr val="accent1"/>
-          </a:effectRef>
-          <a:fontRef idx="minor">
-            <a:schemeClr val="lt1"/>
-          </a:fontRef>
-        </p:style>
-        <p:txBody>
-          <a:bodyPr rtlCol="0" anchor="ctr" wrap="square"/>
-          <a:lstStyle/>
-          <a:p>
-            <a:pPr algn="ctr"/>
-            <a:r>
-              <a:rPr sz="1100" b="1">
-                <a:solidFill>
-                  <a:srgbClr val="1F374E"/>
-                </a:solidFill>
-              </a:rPr>
-              <a:t>Endgerät</a:t>
-            </a:r>
-          </a:p>
-        </p:txBody>
-      </p:sp>
-      <p:sp>
-        <p:nvSpPr>
-          <p:cNvPr id="6" name="Right Arrow 5"/>
-          <p:cNvSpPr/>
-          <p:nvPr/>
-        </p:nvSpPr>
-        <p:spPr>
-          <a:xfrm>
-            <a:off x="7406640" y="1847088"/>
-            <a:ext cx="274320" cy="256032"/>
-          </a:xfrm>
-          <a:prstGeom prst="rightArrow">
-            <a:avLst/>
-          </a:prstGeom>
-          <a:solidFill>
-            <a:srgbClr val="4472C4"/>
-          </a:solidFill>
-          <a:ln>
-            <a:noFill/>
-          </a:ln>
-        </p:spPr>
-        <p:style>
-          <a:lnRef idx="1">
-            <a:schemeClr val="accent1"/>
-          </a:lnRef>
-          <a:fillRef idx="3">
-            <a:schemeClr val="accent1"/>
-          </a:fillRef>
-          <a:effectRef idx="2">
-            <a:schemeClr val="accent1"/>
-          </a:effectRef>
-          <a:fontRef idx="minor">
-            <a:schemeClr val="lt1"/>
-          </a:fontRef>
-        </p:style>
-        <p:txBody>
-          <a:bodyPr rtlCol="0" anchor="ctr"/>
-          <a:lstStyle/>
-          <a:p>
-            <a:pPr algn="ctr"/>
-          </a:p>
-        </p:txBody>
-      </p:sp>
-      <p:sp>
-        <p:nvSpPr>
-          <p:cNvPr id="7" name="Rounded Rectangle 6"/>
-          <p:cNvSpPr/>
-          <p:nvPr/>
-        </p:nvSpPr>
-        <p:spPr>
-          <a:xfrm>
-            <a:off x="7635240" y="1645920"/>
-            <a:ext cx="1508760" cy="731520"/>
-          </a:xfrm>
-          <a:prstGeom prst="roundRect">
-            <a:avLst/>
-          </a:prstGeom>
-          <a:solidFill>
-            <a:srgbClr val="DCE6F1"/>
-          </a:solidFill>
-          <a:ln>
-            <a:solidFill>
-              <a:srgbClr val="4472C4"/>
-            </a:solidFill>
-          </a:ln>
-        </p:spPr>
-        <p:style>
-          <a:lnRef idx="1">
-            <a:schemeClr val="accent1"/>
-          </a:lnRef>
-          <a:fillRef idx="3">
-            <a:schemeClr val="accent1"/>
-          </a:fillRef>
-          <a:effectRef idx="2">
-            <a:schemeClr val="accent1"/>
-          </a:effectRef>
-          <a:fontRef idx="minor">
-            <a:schemeClr val="lt1"/>
-          </a:fontRef>
-        </p:style>
-        <p:txBody>
-          <a:bodyPr rtlCol="0" anchor="ctr" wrap="square"/>
-          <a:lstStyle/>
-          <a:p>
-            <a:pPr algn="ctr"/>
-            <a:r>
-              <a:rPr sz="1100" b="1">
-                <a:solidFill>
-                  <a:srgbClr val="1F374E"/>
-                </a:solidFill>
-              </a:rPr>
-              <a:t>Switch / Access Point</a:t>
-            </a:r>
-          </a:p>
-        </p:txBody>
-      </p:sp>
-      <p:sp>
-        <p:nvSpPr>
-          <p:cNvPr id="8" name="Right Arrow 7"/>
-          <p:cNvSpPr/>
-          <p:nvPr/>
-        </p:nvSpPr>
-        <p:spPr>
-          <a:xfrm>
-            <a:off x="9189720" y="1847088"/>
-            <a:ext cx="274320" cy="256032"/>
-          </a:xfrm>
-          <a:prstGeom prst="rightArrow">
-            <a:avLst/>
-          </a:prstGeom>
-          <a:solidFill>
-            <a:srgbClr val="4472C4"/>
-          </a:solidFill>
-          <a:ln>
-            <a:noFill/>
-          </a:ln>
-        </p:spPr>
-        <p:style>
-          <a:lnRef idx="1">
-            <a:schemeClr val="accent1"/>
-          </a:lnRef>
-          <a:fillRef idx="3">
-            <a:schemeClr val="accent1"/>
-          </a:fillRef>
-          <a:effectRef idx="2">
-            <a:schemeClr val="accent1"/>
-          </a:effectRef>
-          <a:fontRef idx="minor">
-            <a:schemeClr val="lt1"/>
-          </a:fontRef>
-        </p:style>
-        <p:txBody>
-          <a:bodyPr rtlCol="0" anchor="ctr"/>
-          <a:lstStyle/>
-          <a:p>
-            <a:pPr algn="ctr"/>
-          </a:p>
-        </p:txBody>
-      </p:sp>
-      <p:sp>
-        <p:nvSpPr>
-          <p:cNvPr id="9" name="Rounded Rectangle 8"/>
-          <p:cNvSpPr/>
-          <p:nvPr/>
-        </p:nvSpPr>
-        <p:spPr>
-          <a:xfrm>
-            <a:off x="9372600" y="1645920"/>
-            <a:ext cx="1051560" cy="731520"/>
-          </a:xfrm>
-          <a:prstGeom prst="roundRect">
-            <a:avLst/>
-          </a:prstGeom>
-          <a:solidFill>
-            <a:srgbClr val="FFE699"/>
-          </a:solidFill>
-          <a:ln>
-            <a:solidFill>
-              <a:srgbClr val="4472C4"/>
-            </a:solidFill>
-          </a:ln>
-        </p:spPr>
-        <p:style>
-          <a:lnRef idx="1">
-            <a:schemeClr val="accent1"/>
-          </a:lnRef>
-          <a:fillRef idx="3">
-            <a:schemeClr val="accent1"/>
-          </a:fillRef>
-          <a:effectRef idx="2">
-            <a:schemeClr val="accent1"/>
-          </a:effectRef>
-          <a:fontRef idx="minor">
-            <a:schemeClr val="lt1"/>
-          </a:fontRef>
-        </p:style>
-        <p:txBody>
-          <a:bodyPr rtlCol="0" anchor="ctr" wrap="square"/>
-          <a:lstStyle/>
-          <a:p>
-            <a:pPr algn="ctr"/>
-            <a:r>
-              <a:rPr sz="1100" b="1">
-                <a:solidFill>
-                  <a:srgbClr val="1F374E"/>
-                </a:solidFill>
-              </a:rPr>
-              <a:t>Router</a:t>
-            </a:r>
-          </a:p>
-        </p:txBody>
-      </p:sp>
-      <p:sp>
-        <p:nvSpPr>
-          <p:cNvPr id="10" name="Right Arrow 9"/>
-          <p:cNvSpPr/>
-          <p:nvPr/>
-        </p:nvSpPr>
-        <p:spPr>
-          <a:xfrm>
-            <a:off x="10469880" y="1847088"/>
-            <a:ext cx="274320" cy="256032"/>
-          </a:xfrm>
-          <a:prstGeom prst="rightArrow">
-            <a:avLst/>
-          </a:prstGeom>
-          <a:solidFill>
-            <a:srgbClr val="4472C4"/>
-          </a:solidFill>
-          <a:ln>
-            <a:noFill/>
-          </a:ln>
-        </p:spPr>
-        <p:style>
-          <a:lnRef idx="1">
-            <a:schemeClr val="accent1"/>
-          </a:lnRef>
-          <a:fillRef idx="3">
-            <a:schemeClr val="accent1"/>
-          </a:fillRef>
-          <a:effectRef idx="2">
-            <a:schemeClr val="accent1"/>
-          </a:effectRef>
-          <a:fontRef idx="minor">
-            <a:schemeClr val="lt1"/>
-          </a:fontRef>
-        </p:style>
-        <p:txBody>
-          <a:bodyPr rtlCol="0" anchor="ctr"/>
-          <a:lstStyle/>
-          <a:p>
-            <a:pPr algn="ctr"/>
-          </a:p>
-        </p:txBody>
-      </p:sp>
-      <p:sp>
-        <p:nvSpPr>
-          <p:cNvPr id="11" name="Rounded Rectangle 10"/>
-          <p:cNvSpPr/>
-          <p:nvPr/>
-        </p:nvSpPr>
-        <p:spPr>
-          <a:xfrm>
-            <a:off x="10698480" y="1645920"/>
-            <a:ext cx="1005840" cy="731520"/>
-          </a:xfrm>
-          <a:prstGeom prst="roundRect">
-            <a:avLst/>
-          </a:prstGeom>
-          <a:solidFill>
-            <a:srgbClr val="E2EFDA"/>
-          </a:solidFill>
-          <a:ln>
-            <a:solidFill>
-              <a:srgbClr val="4472C4"/>
-            </a:solidFill>
-          </a:ln>
-        </p:spPr>
-        <p:style>
-          <a:lnRef idx="1">
-            <a:schemeClr val="accent1"/>
-          </a:lnRef>
-          <a:fillRef idx="3">
-            <a:schemeClr val="accent1"/>
-          </a:fillRef>
-          <a:effectRef idx="2">
-            <a:schemeClr val="accent1"/>
-          </a:effectRef>
-          <a:fontRef idx="minor">
-            <a:schemeClr val="lt1"/>
-          </a:fontRef>
-        </p:style>
-        <p:txBody>
-          <a:bodyPr rtlCol="0" anchor="ctr" wrap="square"/>
-          <a:lstStyle/>
-          <a:p>
-            <a:pPr algn="ctr"/>
-            <a:r>
-              <a:rPr sz="1100" b="1">
-                <a:solidFill>
-                  <a:srgbClr val="1F374E"/>
-                </a:solidFill>
-              </a:rPr>
-              <a:t>Server</a:t>
-            </a:r>
-          </a:p>
-        </p:txBody>
-      </p:sp>
-      <p:sp>
-        <p:nvSpPr>
-          <p:cNvPr id="12" name="TextBox 11"/>
-          <p:cNvSpPr txBox="1"/>
-          <p:nvPr/>
-        </p:nvSpPr>
-        <p:spPr>
-          <a:xfrm>
-            <a:off x="502920" y="6510528"/>
-            <a:ext cx="11064240" cy="182880"/>
-          </a:xfrm>
-          <a:prstGeom prst="rect">
-            <a:avLst/>
-          </a:prstGeom>
-          <a:noFill/>
-        </p:spPr>
-        <p:txBody>
-          <a:bodyPr wrap="none">
-            <a:spAutoFit/>
-          </a:bodyPr>
-          <a:lstStyle/>
-          <a:p>
-            <a:pPr algn="r"/>
-            <a:r>
-              <a:rPr sz="800">
-                <a:solidFill>
-                  <a:srgbClr val="646464"/>
-                </a:solidFill>
-              </a:rPr>
-              <a:t>Grafik: eigene Darstellung</a:t>
-            </a:r>
-          </a:p>
-        </p:txBody>
-      </p:sp>
-    </p:spTree>
-  </p:cSld>
-  <p:clrMapOvr>
-    <a:masterClrMapping/>
-  </p:clrMapOvr>
-</p:sld>
-</file>
-
-<file path=ppt/slides/slide12.xml><?xml version="1.0" encoding="utf-8"?>
-<p:sld xmlns:a="http://schemas.openxmlformats.org/drawingml/2006/main" xmlns:p="http://schemas.openxmlformats.org/presentationml/2006/main" xmlns:r="http://schemas.openxmlformats.org/officeDocument/2006/relationships">
-  <p:cSld>
-    <p:spTree>
-      <p:nvGrpSpPr>
-        <p:cNvPr id="1" name=""/>
-        <p:cNvGrpSpPr/>
-        <p:nvPr/>
-      </p:nvGrpSpPr>
-      <p:grpSpPr/>
-      <p:sp>
-        <p:nvSpPr>
-          <p:cNvPr id="2" name="Rectangle 1"/>
-          <p:cNvSpPr/>
-          <p:nvPr/>
-        </p:nvSpPr>
-        <p:spPr>
-          <a:xfrm>
-            <a:off x="0" y="0"/>
-            <a:ext cx="12191695" cy="100584"/>
-          </a:xfrm>
-          <a:prstGeom prst="rect">
-            <a:avLst/>
-          </a:prstGeom>
-          <a:solidFill>
-            <a:srgbClr val="4472C4"/>
-          </a:solidFill>
-          <a:ln>
-            <a:noFill/>
-          </a:ln>
-        </p:spPr>
-        <p:style>
-          <a:lnRef idx="1">
-            <a:schemeClr val="accent1"/>
-          </a:lnRef>
-          <a:fillRef idx="3">
-            <a:schemeClr val="accent1"/>
-          </a:fillRef>
-          <a:effectRef idx="2">
-            <a:schemeClr val="accent1"/>
-          </a:effectRef>
-          <a:fontRef idx="minor">
-            <a:schemeClr val="lt1"/>
-          </a:fontRef>
-        </p:style>
-        <p:txBody>
-          <a:bodyPr rtlCol="0" anchor="ctr"/>
-          <a:lstStyle/>
-          <a:p>
-            <a:pPr algn="ctr"/>
-          </a:p>
-        </p:txBody>
-      </p:sp>
-      <p:sp>
-        <p:nvSpPr>
-          <p:cNvPr id="3" name="TextBox 2"/>
-          <p:cNvSpPr txBox="1"/>
-          <p:nvPr/>
-        </p:nvSpPr>
-        <p:spPr>
-          <a:xfrm>
-            <a:off x="594360" y="320040"/>
-            <a:ext cx="10972800" cy="502920"/>
-          </a:xfrm>
-          <a:prstGeom prst="rect">
-            <a:avLst/>
-          </a:prstGeom>
-          <a:noFill/>
-        </p:spPr>
-        <p:txBody>
-          <a:bodyPr wrap="none">
-            <a:spAutoFit/>
-          </a:bodyPr>
-          <a:lstStyle/>
-          <a:p>
-            <a:r>
-              <a:rPr sz="2600" b="1">
-                <a:solidFill>
-                  <a:srgbClr val="1F374E"/>
-                </a:solidFill>
-              </a:rPr>
-              <a:t>Datenwege untersuchen – wie prüfe ich?</a:t>
-            </a:r>
-          </a:p>
-        </p:txBody>
-      </p:sp>
-      <p:sp>
-        <p:nvSpPr>
-          <p:cNvPr id="4" name="TextBox 3"/>
-          <p:cNvSpPr txBox="1"/>
-          <p:nvPr/>
-        </p:nvSpPr>
-        <p:spPr>
-          <a:xfrm>
-            <a:off x="685800" y="1234440"/>
-            <a:ext cx="5303520" cy="4937760"/>
-          </a:xfrm>
-          <a:prstGeom prst="rect">
-            <a:avLst/>
-          </a:prstGeom>
-          <a:noFill/>
-        </p:spPr>
-        <p:txBody>
-          <a:bodyPr wrap="square">
-            <a:spAutoFit/>
-          </a:bodyPr>
-          <a:lstStyle/>
-          <a:p>
-            <a:pPr>
-              <a:spcAft>
-                <a:spcPts val="800"/>
-              </a:spcAft>
-              <a:defRPr sz="1900">
-                <a:solidFill>
-                  <a:srgbClr val="232323"/>
-                </a:solidFill>
-              </a:defRPr>
-            </a:pPr>
-            <a:r>
-              <a:t>1. Gerät verbunden? Kabel eingesteckt oder richtiges WLAN verbunden?</a:t>
-            </a:r>
-          </a:p>
-          <a:p>
-            <a:pPr>
-              <a:spcAft>
-                <a:spcPts val="800"/>
-              </a:spcAft>
-              <a:defRPr sz="1900">
-                <a:solidFill>
-                  <a:srgbClr val="232323"/>
-                </a:solidFill>
-              </a:defRPr>
-            </a:pPr>
-            <a:r>
-              <a:t>2. Lokales Netz erreichbar? Gegebenenfalls ein von der Lehrkraft vorgegebenes Ziel mit ping prüfen.</a:t>
-            </a:r>
-          </a:p>
-          <a:p>
-            <a:pPr>
-              <a:spcAft>
-                <a:spcPts val="800"/>
-              </a:spcAft>
-              <a:defRPr sz="1900">
-                <a:solidFill>
-                  <a:srgbClr val="232323"/>
-                </a:solidFill>
-              </a:defRPr>
-            </a:pPr>
-            <a:r>
-              <a:t>3. Andere bekannte Webseite erreichbar?</a:t>
-            </a:r>
-          </a:p>
-          <a:p>
-            <a:pPr>
-              <a:spcAft>
-                <a:spcPts val="800"/>
-              </a:spcAft>
-              <a:defRPr sz="1900">
-                <a:solidFill>
-                  <a:srgbClr val="232323"/>
-                </a:solidFill>
-              </a:defRPr>
-            </a:pPr>
-            <a:r>
-              <a:t>4. Namensauflösung als mögliche Fehlerstelle prüfen.</a:t>
-            </a:r>
-          </a:p>
-          <a:p>
-            <a:pPr>
-              <a:spcAft>
-                <a:spcPts val="800"/>
-              </a:spcAft>
-              <a:defRPr sz="1900">
-                <a:solidFill>
-                  <a:srgbClr val="232323"/>
-                </a:solidFill>
-              </a:defRPr>
-            </a:pPr>
-            <a:r>
-              <a:t>5. Funktioniert nur der gewünschte Dienst nicht?</a:t>
-            </a:r>
-          </a:p>
-        </p:txBody>
-      </p:sp>
-      <p:sp>
-        <p:nvSpPr>
-          <p:cNvPr id="5" name="Rectangle 4"/>
-          <p:cNvSpPr/>
-          <p:nvPr/>
-        </p:nvSpPr>
-        <p:spPr>
-          <a:xfrm>
-            <a:off x="6400800" y="1554480"/>
-            <a:ext cx="4663440" cy="2560320"/>
-          </a:xfrm>
-          <a:prstGeom prst="rect">
-            <a:avLst/>
-          </a:prstGeom>
-          <a:solidFill>
-            <a:srgbClr val="FAFAFA"/>
-          </a:solidFill>
-          <a:ln>
-            <a:solidFill>
-              <a:srgbClr val="646464"/>
-            </a:solidFill>
-          </a:ln>
-        </p:spPr>
-        <p:style>
-          <a:lnRef idx="1">
-            <a:schemeClr val="accent1"/>
-          </a:lnRef>
-          <a:fillRef idx="3">
-            <a:schemeClr val="accent1"/>
-          </a:fillRef>
-          <a:effectRef idx="2">
-            <a:schemeClr val="accent1"/>
-          </a:effectRef>
-          <a:fontRef idx="minor">
-            <a:schemeClr val="lt1"/>
-          </a:fontRef>
-        </p:style>
-        <p:txBody>
-          <a:bodyPr rtlCol="0" anchor="ctr" wrap="none"/>
-          <a:lstStyle/>
-          <a:p>
-            <a:pPr algn="ctr"/>
-            <a:r>
-              <a:rPr sz="1500">
-                <a:solidFill>
-                  <a:srgbClr val="232323"/>
-                </a:solidFill>
-                <a:latin typeface="Consolas"/>
-              </a:rPr>
-              <a:t>Beispiel:
-ping 192.168.1.1
-Nur ein von der Lehrkraft
-vorgegebenes Testziel verwenden.</a:t>
-            </a:r>
-          </a:p>
-        </p:txBody>
-      </p:sp>
-      <p:sp>
-        <p:nvSpPr>
-          <p:cNvPr id="6" name="TextBox 5"/>
-          <p:cNvSpPr txBox="1"/>
-          <p:nvPr/>
-        </p:nvSpPr>
-        <p:spPr>
-          <a:xfrm>
-            <a:off x="502920" y="6510528"/>
-            <a:ext cx="11064240" cy="182880"/>
-          </a:xfrm>
-          <a:prstGeom prst="rect">
-            <a:avLst/>
-          </a:prstGeom>
-          <a:noFill/>
-        </p:spPr>
-        <p:txBody>
-          <a:bodyPr wrap="none">
-            <a:spAutoFit/>
-          </a:bodyPr>
-          <a:lstStyle/>
-          <a:p>
-            <a:pPr algn="r"/>
-            <a:r>
-              <a:rPr sz="800">
-                <a:solidFill>
-                  <a:srgbClr val="646464"/>
-                </a:solidFill>
-              </a:rPr>
-              <a:t>Grafik: eigene Darstellung</a:t>
-            </a:r>
-          </a:p>
-        </p:txBody>
-      </p:sp>
-    </p:spTree>
-  </p:cSld>
-  <p:clrMapOvr>
-    <a:masterClrMapping/>
-  </p:clrMapOvr>
-</p:sld>
-</file>
-
-<file path=ppt/slides/slide13.xml><?xml version="1.0" encoding="utf-8"?>
-<p:sld xmlns:a="http://schemas.openxmlformats.org/drawingml/2006/main" xmlns:p="http://schemas.openxmlformats.org/presentationml/2006/main" xmlns:r="http://schemas.openxmlformats.org/officeDocument/2006/relationships">
-  <p:cSld>
-    <p:spTree>
-      <p:nvGrpSpPr>
-        <p:cNvPr id="1" name=""/>
-        <p:cNvGrpSpPr/>
-        <p:nvPr/>
-      </p:nvGrpSpPr>
-      <p:grpSpPr/>
-      <p:sp>
-        <p:nvSpPr>
-          <p:cNvPr id="2" name="Rectangle 1"/>
-          <p:cNvSpPr/>
-          <p:nvPr/>
-        </p:nvSpPr>
-        <p:spPr>
-          <a:xfrm>
-            <a:off x="0" y="0"/>
-            <a:ext cx="12191695" cy="100584"/>
-          </a:xfrm>
-          <a:prstGeom prst="rect">
-            <a:avLst/>
-          </a:prstGeom>
-          <a:solidFill>
-            <a:srgbClr val="4472C4"/>
-          </a:solidFill>
-          <a:ln>
-            <a:noFill/>
-          </a:ln>
-        </p:spPr>
-        <p:style>
-          <a:lnRef idx="1">
-            <a:schemeClr val="accent1"/>
-          </a:lnRef>
-          <a:fillRef idx="3">
-            <a:schemeClr val="accent1"/>
-          </a:fillRef>
-          <a:effectRef idx="2">
-            <a:schemeClr val="accent1"/>
-          </a:effectRef>
-          <a:fontRef idx="minor">
-            <a:schemeClr val="lt1"/>
-          </a:fontRef>
-        </p:style>
-        <p:txBody>
-          <a:bodyPr rtlCol="0" anchor="ctr"/>
-          <a:lstStyle/>
-          <a:p>
-            <a:pPr algn="ctr"/>
-          </a:p>
-        </p:txBody>
-      </p:sp>
-      <p:sp>
-        <p:nvSpPr>
-          <p:cNvPr id="3" name="TextBox 2"/>
-          <p:cNvSpPr txBox="1"/>
-          <p:nvPr/>
-        </p:nvSpPr>
-        <p:spPr>
-          <a:xfrm>
-            <a:off x="594360" y="320040"/>
-            <a:ext cx="10972800" cy="502920"/>
-          </a:xfrm>
-          <a:prstGeom prst="rect">
-            <a:avLst/>
-          </a:prstGeom>
-          <a:noFill/>
-        </p:spPr>
-        <p:txBody>
-          <a:bodyPr wrap="none">
-            <a:spAutoFit/>
-          </a:bodyPr>
-          <a:lstStyle/>
-          <a:p>
-            <a:r>
-              <a:rPr sz="2600" b="1">
-                <a:solidFill>
-                  <a:srgbClr val="1F374E"/>
-                </a:solidFill>
-              </a:rPr>
-              <a:t>Sicherung – Das solltest du erklären können</a:t>
-            </a:r>
-          </a:p>
-        </p:txBody>
-      </p:sp>
-      <p:sp>
-        <p:nvSpPr>
-          <p:cNvPr id="4" name="TextBox 3"/>
-          <p:cNvSpPr txBox="1"/>
-          <p:nvPr/>
-        </p:nvSpPr>
-        <p:spPr>
-          <a:xfrm>
-            <a:off x="685800" y="1234440"/>
-            <a:ext cx="5303520" cy="4937760"/>
-          </a:xfrm>
-          <a:prstGeom prst="rect">
-            <a:avLst/>
-          </a:prstGeom>
-          <a:noFill/>
-        </p:spPr>
-        <p:txBody>
-          <a:bodyPr wrap="square">
-            <a:spAutoFit/>
-          </a:bodyPr>
-          <a:lstStyle/>
-          <a:p>
-            <a:pPr>
-              <a:spcAft>
-                <a:spcPts val="800"/>
-              </a:spcAft>
-              <a:defRPr sz="1900">
-                <a:solidFill>
-                  <a:srgbClr val="232323"/>
-                </a:solidFill>
-              </a:defRPr>
-            </a:pPr>
-            <a:r>
-              <a:t>Wie gelangen Daten vom Endgerät zu einem Server?</a:t>
-            </a:r>
-          </a:p>
-          <a:p>
-            <a:pPr>
-              <a:spcAft>
-                <a:spcPts val="800"/>
-              </a:spcAft>
-              <a:defRPr sz="1900">
-                <a:solidFill>
-                  <a:srgbClr val="232323"/>
-                </a:solidFill>
-              </a:defRPr>
-            </a:pPr>
-            <a:r>
-              <a:t>Welche Aufgaben haben Router, Switch und Access Point?</a:t>
-            </a:r>
-          </a:p>
-          <a:p>
-            <a:pPr>
-              <a:spcAft>
-                <a:spcPts val="800"/>
-              </a:spcAft>
-              <a:defRPr sz="1900">
-                <a:solidFill>
-                  <a:srgbClr val="232323"/>
-                </a:solidFill>
-              </a:defRPr>
-            </a:pPr>
-            <a:r>
-              <a:t>Was ist eine IP-Adresse?</a:t>
-            </a:r>
-          </a:p>
-          <a:p>
-            <a:pPr>
-              <a:spcAft>
-                <a:spcPts val="800"/>
-              </a:spcAft>
-              <a:defRPr sz="1900">
-                <a:solidFill>
-                  <a:srgbClr val="232323"/>
-                </a:solidFill>
-              </a:defRPr>
-            </a:pPr>
-            <a:r>
-              <a:t>Was macht das Domain Name System (DNS)?</a:t>
-            </a:r>
-          </a:p>
-          <a:p>
-            <a:pPr>
-              <a:spcAft>
-                <a:spcPts val="800"/>
-              </a:spcAft>
-              <a:defRPr sz="1900">
-                <a:solidFill>
-                  <a:srgbClr val="232323"/>
-                </a:solidFill>
-              </a:defRPr>
-            </a:pPr>
-            <a:r>
-              <a:t>Was unterscheidet Protokoll und Netzwerkdienst?</a:t>
-            </a:r>
-          </a:p>
-        </p:txBody>
-      </p:sp>
-      <p:sp>
-        <p:nvSpPr>
-          <p:cNvPr id="5" name="TextBox 4"/>
-          <p:cNvSpPr txBox="1"/>
-          <p:nvPr/>
-        </p:nvSpPr>
-        <p:spPr>
-          <a:xfrm>
-            <a:off x="502920" y="6510528"/>
-            <a:ext cx="11064240" cy="182880"/>
-          </a:xfrm>
-          <a:prstGeom prst="rect">
-            <a:avLst/>
-          </a:prstGeom>
-          <a:noFill/>
-        </p:spPr>
-        <p:txBody>
-          <a:bodyPr wrap="none">
-            <a:spAutoFit/>
-          </a:bodyPr>
-          <a:lstStyle/>
-          <a:p>
-            <a:pPr algn="r"/>
-            <a:r>
-              <a:rPr sz="800">
-                <a:solidFill>
-                  <a:srgbClr val="646464"/>
-                </a:solidFill>
-              </a:rPr>
-              <a:t>Grafik: eigene Darstellung</a:t>
-            </a:r>
-          </a:p>
-        </p:txBody>
-      </p:sp>
-    </p:spTree>
-  </p:cSld>
-  <p:clrMapOvr>
-    <a:masterClrMapping/>
-  </p:clrMapOvr>
-</p:sld>
-</file>
-
-<file path=ppt/slides/slide14.xml><?xml version="1.0" encoding="utf-8"?>
-<p:sld xmlns:a="http://schemas.openxmlformats.org/drawingml/2006/main" xmlns:p="http://schemas.openxmlformats.org/presentationml/2006/main" xmlns:r="http://schemas.openxmlformats.org/officeDocument/2006/relationships">
-  <p:cSld>
-    <p:spTree>
-      <p:nvGrpSpPr>
-        <p:cNvPr id="1" name=""/>
-        <p:cNvGrpSpPr/>
-        <p:nvPr/>
-      </p:nvGrpSpPr>
-      <p:grpSpPr/>
-      <p:sp>
-        <p:nvSpPr>
-          <p:cNvPr id="2" name="Rectangle 1"/>
-          <p:cNvSpPr/>
-          <p:nvPr/>
-        </p:nvSpPr>
-        <p:spPr>
-          <a:xfrm>
-            <a:off x="0" y="0"/>
-            <a:ext cx="12191695" cy="100584"/>
-          </a:xfrm>
-          <a:prstGeom prst="rect">
-            <a:avLst/>
-          </a:prstGeom>
-          <a:solidFill>
-            <a:srgbClr val="4472C4"/>
-          </a:solidFill>
-          <a:ln>
-            <a:noFill/>
-          </a:ln>
-        </p:spPr>
-        <p:style>
-          <a:lnRef idx="1">
-            <a:schemeClr val="accent1"/>
-          </a:lnRef>
-          <a:fillRef idx="3">
-            <a:schemeClr val="accent1"/>
-          </a:fillRef>
-          <a:effectRef idx="2">
-            <a:schemeClr val="accent1"/>
-          </a:effectRef>
-          <a:fontRef idx="minor">
-            <a:schemeClr val="lt1"/>
-          </a:fontRef>
-        </p:style>
-        <p:txBody>
-          <a:bodyPr rtlCol="0" anchor="ctr"/>
-          <a:lstStyle/>
-          <a:p>
-            <a:pPr algn="ctr"/>
-          </a:p>
-        </p:txBody>
-      </p:sp>
-      <p:sp>
-        <p:nvSpPr>
-          <p:cNvPr id="3" name="TextBox 2"/>
-          <p:cNvSpPr txBox="1"/>
-          <p:nvPr/>
-        </p:nvSpPr>
-        <p:spPr>
-          <a:xfrm>
-            <a:off x="594360" y="320040"/>
-            <a:ext cx="10972800" cy="502920"/>
-          </a:xfrm>
-          <a:prstGeom prst="rect">
-            <a:avLst/>
-          </a:prstGeom>
-          <a:noFill/>
-        </p:spPr>
-        <p:txBody>
-          <a:bodyPr wrap="none">
-            <a:spAutoFit/>
-          </a:bodyPr>
-          <a:lstStyle/>
-          <a:p>
-            <a:r>
-              <a:rPr sz="2600" b="1">
-                <a:solidFill>
-                  <a:srgbClr val="1F374E"/>
-                </a:solidFill>
-              </a:rPr>
-              <a:t>Quellen</a:t>
-            </a:r>
-          </a:p>
-        </p:txBody>
-      </p:sp>
-      <p:sp>
-        <p:nvSpPr>
-          <p:cNvPr id="4" name="TextBox 3"/>
-          <p:cNvSpPr txBox="1"/>
-          <p:nvPr/>
-        </p:nvSpPr>
-        <p:spPr>
-          <a:xfrm>
-            <a:off x="731520" y="1234440"/>
-            <a:ext cx="10698480" cy="5029200"/>
-          </a:xfrm>
-          <a:prstGeom prst="rect">
-            <a:avLst/>
-          </a:prstGeom>
-          <a:noFill/>
-        </p:spPr>
-        <p:txBody>
-          <a:bodyPr wrap="square">
-            <a:spAutoFit/>
-          </a:bodyPr>
-          <a:lstStyle/>
-          <a:p>
-            <a:pPr>
-              <a:spcAft>
-                <a:spcPts val="800"/>
-              </a:spcAft>
-              <a:defRPr sz="1500">
-                <a:solidFill>
-                  <a:srgbClr val="232323"/>
-                </a:solidFill>
-              </a:defRPr>
-            </a:pPr>
-            <a:r>
-              <a:t>Sächsischer Lehrplan Oberschule Informatik, Klassenstufe 8: https://www.schulportal.sachsen.de/lplandb/lehrplan/514</a:t>
-            </a:r>
-          </a:p>
-          <a:p>
-            <a:pPr>
-              <a:spcAft>
-                <a:spcPts val="800"/>
-              </a:spcAft>
-              <a:defRPr sz="1500">
-                <a:solidFill>
-                  <a:srgbClr val="232323"/>
-                </a:solidFill>
-              </a:defRPr>
-            </a:pPr>
-            <a:r>
-              <a:t>Grafiken und Diagnosebeispiele: eigene didaktische Darstellung.</a:t>
-            </a:r>
-          </a:p>
-        </p:txBody>
-      </p:sp>
-      <p:sp>
-        <p:nvSpPr>
-          <p:cNvPr id="5" name="TextBox 4"/>
-          <p:cNvSpPr txBox="1"/>
-          <p:nvPr/>
-        </p:nvSpPr>
-        <p:spPr>
-          <a:xfrm>
-            <a:off x="502920" y="6510528"/>
-            <a:ext cx="11064240" cy="182880"/>
-          </a:xfrm>
-          <a:prstGeom prst="rect">
-            <a:avLst/>
-          </a:prstGeom>
-          <a:noFill/>
-        </p:spPr>
-        <p:txBody>
-          <a:bodyPr wrap="none">
-            <a:spAutoFit/>
-          </a:bodyPr>
-          <a:lstStyle/>
-          <a:p>
-            <a:pPr algn="r"/>
-            <a:r>
-              <a:rPr sz="800">
-                <a:solidFill>
-                  <a:srgbClr val="646464"/>
-                </a:solidFill>
-              </a:rPr>
-              <a:t>Quellenangaben · Grafiken: eigene Darstellung</a:t>
+              <a:t>Klasse 8 · Pflichtpräsentation</a:t>
             </a:r>
           </a:p>
         </p:txBody>
@@ -6346,13 +4212,13 @@
         <p:spPr>
           <a:xfrm>
             <a:off x="0" y="0"/>
-            <a:ext cx="12191695" cy="100584"/>
+            <a:ext cx="12191695" cy="109728"/>
           </a:xfrm>
           <a:prstGeom prst="rect">
             <a:avLst/>
           </a:prstGeom>
           <a:solidFill>
-            <a:srgbClr val="4472C4"/>
+            <a:srgbClr val="305396"/>
           </a:solidFill>
           <a:ln>
             <a:noFill/>
@@ -6389,7 +4255,7 @@
         <p:spPr>
           <a:xfrm>
             <a:off x="594360" y="320040"/>
-            <a:ext cx="10972800" cy="502920"/>
+            <a:ext cx="10972800" cy="548640"/>
           </a:xfrm>
           <a:prstGeom prst="rect">
             <a:avLst/>
@@ -6405,7 +4271,7 @@
             <a:r>
               <a:rPr sz="2600" b="1">
                 <a:solidFill>
-                  <a:srgbClr val="1F374E"/>
+                  <a:srgbClr val="202C3C"/>
                 </a:solidFill>
               </a:rPr>
               <a:t>Leitfrage</a:t>
@@ -6421,18 +4287,18 @@
         </p:nvSpPr>
         <p:spPr>
           <a:xfrm>
-            <a:off x="822960" y="1325880"/>
-            <a:ext cx="10515600" cy="1417320"/>
+            <a:off x="777240" y="1234440"/>
+            <a:ext cx="10789920" cy="1234440"/>
           </a:xfrm>
           <a:prstGeom prst="roundRect">
             <a:avLst/>
           </a:prstGeom>
           <a:solidFill>
-            <a:srgbClr val="DCE6F1"/>
+            <a:srgbClr val="E5ECF6"/>
           </a:solidFill>
           <a:ln>
             <a:solidFill>
-              <a:srgbClr val="4472C4"/>
+              <a:srgbClr val="305396"/>
             </a:solidFill>
           </a:ln>
         </p:spPr>
@@ -6456,9 +4322,9 @@
           <a:p>
             <a:pPr algn="ctr"/>
             <a:r>
-              <a:rPr sz="2400" b="1">
-                <a:solidFill>
-                  <a:srgbClr val="1F374E"/>
+              <a:rPr sz="2200" b="1">
+                <a:solidFill>
+                  <a:srgbClr val="202C3C"/>
                 </a:solidFill>
               </a:rPr>
               <a:t>Wie gelangen Daten von unserem Gerät zu einem Dienst im Netzwerk oder Internet?</a:t>
@@ -6474,18 +4340,18 @@
         </p:nvSpPr>
         <p:spPr>
           <a:xfrm>
-            <a:off x="6217920" y="3246120"/>
-            <a:ext cx="1143000" cy="731520"/>
+            <a:off x="6309360" y="2743200"/>
+            <a:ext cx="1280160" cy="731520"/>
           </a:xfrm>
           <a:prstGeom prst="roundRect">
             <a:avLst/>
           </a:prstGeom>
           <a:solidFill>
-            <a:srgbClr val="F2F6FA"/>
+            <a:srgbClr val="E5ECF6"/>
           </a:solidFill>
           <a:ln>
             <a:solidFill>
-              <a:srgbClr val="4472C4"/>
+              <a:srgbClr val="305396"/>
             </a:solidFill>
           </a:ln>
         </p:spPr>
@@ -6509,9 +4375,9 @@
           <a:p>
             <a:pPr algn="ctr"/>
             <a:r>
-              <a:rPr sz="1100" b="1">
-                <a:solidFill>
-                  <a:srgbClr val="1F374E"/>
+              <a:rPr sz="1600" b="1">
+                <a:solidFill>
+                  <a:srgbClr val="202C3C"/>
                 </a:solidFill>
               </a:rPr>
               <a:t>Endgerät</a:t>
@@ -6521,23 +4387,25 @@
       </p:sp>
       <p:sp>
         <p:nvSpPr>
-          <p:cNvPr id="6" name="Right Arrow 5"/>
+          <p:cNvPr id="6" name="Rounded Rectangle 5"/>
           <p:cNvSpPr/>
           <p:nvPr/>
         </p:nvSpPr>
         <p:spPr>
           <a:xfrm>
-            <a:off x="7406640" y="3447288"/>
-            <a:ext cx="274320" cy="256032"/>
-          </a:xfrm>
-          <a:prstGeom prst="rightArrow">
+            <a:off x="7955279" y="2743200"/>
+            <a:ext cx="1280160" cy="731520"/>
+          </a:xfrm>
+          <a:prstGeom prst="roundRect">
             <a:avLst/>
           </a:prstGeom>
           <a:solidFill>
-            <a:srgbClr val="4472C4"/>
+            <a:srgbClr val="FFE899"/>
           </a:solidFill>
           <a:ln>
-            <a:noFill/>
+            <a:solidFill>
+              <a:srgbClr val="305396"/>
+            </a:solidFill>
           </a:ln>
         </p:spPr>
         <p:style>
@@ -6555,10 +4423,18 @@
           </a:fontRef>
         </p:style>
         <p:txBody>
-          <a:bodyPr rtlCol="0" anchor="ctr"/>
+          <a:bodyPr rtlCol="0" anchor="ctr" wrap="square"/>
           <a:lstStyle/>
           <a:p>
             <a:pPr algn="ctr"/>
+            <a:r>
+              <a:rPr sz="1600" b="1">
+                <a:solidFill>
+                  <a:srgbClr val="202C3C"/>
+                </a:solidFill>
+              </a:rPr>
+              <a:t>Router</a:t>
+            </a:r>
           </a:p>
         </p:txBody>
       </p:sp>
@@ -6570,18 +4446,18 @@
         </p:nvSpPr>
         <p:spPr>
           <a:xfrm>
-            <a:off x="7635240" y="3246120"/>
-            <a:ext cx="1508760" cy="731520"/>
+            <a:off x="9601200" y="2743200"/>
+            <a:ext cx="1280160" cy="731520"/>
           </a:xfrm>
           <a:prstGeom prst="roundRect">
             <a:avLst/>
           </a:prstGeom>
           <a:solidFill>
-            <a:srgbClr val="DCE6F1"/>
+            <a:srgbClr val="DDEEDD"/>
           </a:solidFill>
           <a:ln>
             <a:solidFill>
-              <a:srgbClr val="4472C4"/>
+              <a:srgbClr val="305396"/>
             </a:solidFill>
           </a:ln>
         </p:spPr>
@@ -6605,201 +4481,9 @@
           <a:p>
             <a:pPr algn="ctr"/>
             <a:r>
-              <a:rPr sz="1100" b="1">
-                <a:solidFill>
-                  <a:srgbClr val="1F374E"/>
-                </a:solidFill>
-              </a:rPr>
-              <a:t>Switch / Access Point</a:t>
-            </a:r>
-          </a:p>
-        </p:txBody>
-      </p:sp>
-      <p:sp>
-        <p:nvSpPr>
-          <p:cNvPr id="8" name="Right Arrow 7"/>
-          <p:cNvSpPr/>
-          <p:nvPr/>
-        </p:nvSpPr>
-        <p:spPr>
-          <a:xfrm>
-            <a:off x="9189720" y="3447288"/>
-            <a:ext cx="274320" cy="256032"/>
-          </a:xfrm>
-          <a:prstGeom prst="rightArrow">
-            <a:avLst/>
-          </a:prstGeom>
-          <a:solidFill>
-            <a:srgbClr val="4472C4"/>
-          </a:solidFill>
-          <a:ln>
-            <a:noFill/>
-          </a:ln>
-        </p:spPr>
-        <p:style>
-          <a:lnRef idx="1">
-            <a:schemeClr val="accent1"/>
-          </a:lnRef>
-          <a:fillRef idx="3">
-            <a:schemeClr val="accent1"/>
-          </a:fillRef>
-          <a:effectRef idx="2">
-            <a:schemeClr val="accent1"/>
-          </a:effectRef>
-          <a:fontRef idx="minor">
-            <a:schemeClr val="lt1"/>
-          </a:fontRef>
-        </p:style>
-        <p:txBody>
-          <a:bodyPr rtlCol="0" anchor="ctr"/>
-          <a:lstStyle/>
-          <a:p>
-            <a:pPr algn="ctr"/>
-          </a:p>
-        </p:txBody>
-      </p:sp>
-      <p:sp>
-        <p:nvSpPr>
-          <p:cNvPr id="9" name="Rounded Rectangle 8"/>
-          <p:cNvSpPr/>
-          <p:nvPr/>
-        </p:nvSpPr>
-        <p:spPr>
-          <a:xfrm>
-            <a:off x="9372600" y="3246120"/>
-            <a:ext cx="1051560" cy="731520"/>
-          </a:xfrm>
-          <a:prstGeom prst="roundRect">
-            <a:avLst/>
-          </a:prstGeom>
-          <a:solidFill>
-            <a:srgbClr val="FFE699"/>
-          </a:solidFill>
-          <a:ln>
-            <a:solidFill>
-              <a:srgbClr val="4472C4"/>
-            </a:solidFill>
-          </a:ln>
-        </p:spPr>
-        <p:style>
-          <a:lnRef idx="1">
-            <a:schemeClr val="accent1"/>
-          </a:lnRef>
-          <a:fillRef idx="3">
-            <a:schemeClr val="accent1"/>
-          </a:fillRef>
-          <a:effectRef idx="2">
-            <a:schemeClr val="accent1"/>
-          </a:effectRef>
-          <a:fontRef idx="minor">
-            <a:schemeClr val="lt1"/>
-          </a:fontRef>
-        </p:style>
-        <p:txBody>
-          <a:bodyPr rtlCol="0" anchor="ctr" wrap="square"/>
-          <a:lstStyle/>
-          <a:p>
-            <a:pPr algn="ctr"/>
-            <a:r>
-              <a:rPr sz="1100" b="1">
-                <a:solidFill>
-                  <a:srgbClr val="1F374E"/>
-                </a:solidFill>
-              </a:rPr>
-              <a:t>Router</a:t>
-            </a:r>
-          </a:p>
-        </p:txBody>
-      </p:sp>
-      <p:sp>
-        <p:nvSpPr>
-          <p:cNvPr id="10" name="Right Arrow 9"/>
-          <p:cNvSpPr/>
-          <p:nvPr/>
-        </p:nvSpPr>
-        <p:spPr>
-          <a:xfrm>
-            <a:off x="10469880" y="3447288"/>
-            <a:ext cx="274320" cy="256032"/>
-          </a:xfrm>
-          <a:prstGeom prst="rightArrow">
-            <a:avLst/>
-          </a:prstGeom>
-          <a:solidFill>
-            <a:srgbClr val="4472C4"/>
-          </a:solidFill>
-          <a:ln>
-            <a:noFill/>
-          </a:ln>
-        </p:spPr>
-        <p:style>
-          <a:lnRef idx="1">
-            <a:schemeClr val="accent1"/>
-          </a:lnRef>
-          <a:fillRef idx="3">
-            <a:schemeClr val="accent1"/>
-          </a:fillRef>
-          <a:effectRef idx="2">
-            <a:schemeClr val="accent1"/>
-          </a:effectRef>
-          <a:fontRef idx="minor">
-            <a:schemeClr val="lt1"/>
-          </a:fontRef>
-        </p:style>
-        <p:txBody>
-          <a:bodyPr rtlCol="0" anchor="ctr"/>
-          <a:lstStyle/>
-          <a:p>
-            <a:pPr algn="ctr"/>
-          </a:p>
-        </p:txBody>
-      </p:sp>
-      <p:sp>
-        <p:nvSpPr>
-          <p:cNvPr id="11" name="Rounded Rectangle 10"/>
-          <p:cNvSpPr/>
-          <p:nvPr/>
-        </p:nvSpPr>
-        <p:spPr>
-          <a:xfrm>
-            <a:off x="10698480" y="3246120"/>
-            <a:ext cx="1005840" cy="731520"/>
-          </a:xfrm>
-          <a:prstGeom prst="roundRect">
-            <a:avLst/>
-          </a:prstGeom>
-          <a:solidFill>
-            <a:srgbClr val="E2EFDA"/>
-          </a:solidFill>
-          <a:ln>
-            <a:solidFill>
-              <a:srgbClr val="4472C4"/>
-            </a:solidFill>
-          </a:ln>
-        </p:spPr>
-        <p:style>
-          <a:lnRef idx="1">
-            <a:schemeClr val="accent1"/>
-          </a:lnRef>
-          <a:fillRef idx="3">
-            <a:schemeClr val="accent1"/>
-          </a:fillRef>
-          <a:effectRef idx="2">
-            <a:schemeClr val="accent1"/>
-          </a:effectRef>
-          <a:fontRef idx="minor">
-            <a:schemeClr val="lt1"/>
-          </a:fontRef>
-        </p:style>
-        <p:txBody>
-          <a:bodyPr rtlCol="0" anchor="ctr" wrap="square"/>
-          <a:lstStyle/>
-          <a:p>
-            <a:pPr algn="ctr"/>
-            <a:r>
-              <a:rPr sz="1100" b="1">
-                <a:solidFill>
-                  <a:srgbClr val="1F374E"/>
+              <a:rPr sz="1600" b="1">
+                <a:solidFill>
+                  <a:srgbClr val="202C3C"/>
                 </a:solidFill>
               </a:rPr>
               <a:t>Server</a:t>
@@ -6809,14 +4493,14 @@
       </p:sp>
       <p:sp>
         <p:nvSpPr>
-          <p:cNvPr id="12" name="TextBox 11"/>
+          <p:cNvPr id="8" name="TextBox 7"/>
           <p:cNvSpPr txBox="1"/>
           <p:nvPr/>
         </p:nvSpPr>
         <p:spPr>
           <a:xfrm>
-            <a:off x="502920" y="6510528"/>
-            <a:ext cx="11064240" cy="182880"/>
+            <a:off x="365760" y="6510528"/>
+            <a:ext cx="11430000" cy="228600"/>
           </a:xfrm>
           <a:prstGeom prst="rect">
             <a:avLst/>
@@ -6833,7 +4517,7 @@
             <a:r>
               <a:rPr sz="800">
                 <a:solidFill>
-                  <a:srgbClr val="646464"/>
+                  <a:srgbClr val="6E6E6E"/>
                 </a:solidFill>
               </a:rPr>
               <a:t>Grafik: eigene Darstellung</a:t>
@@ -6868,13 +4552,13 @@
         <p:spPr>
           <a:xfrm>
             <a:off x="0" y="0"/>
-            <a:ext cx="12191695" cy="100584"/>
+            <a:ext cx="12191695" cy="109728"/>
           </a:xfrm>
           <a:prstGeom prst="rect">
             <a:avLst/>
           </a:prstGeom>
           <a:solidFill>
-            <a:srgbClr val="4472C4"/>
+            <a:srgbClr val="305396"/>
           </a:solidFill>
           <a:ln>
             <a:noFill/>
@@ -6911,7 +4595,7 @@
         <p:spPr>
           <a:xfrm>
             <a:off x="594360" y="320040"/>
-            <a:ext cx="10972800" cy="502920"/>
+            <a:ext cx="10972800" cy="548640"/>
           </a:xfrm>
           <a:prstGeom prst="rect">
             <a:avLst/>
@@ -6927,10 +4611,10 @@
             <a:r>
               <a:rPr sz="2600" b="1">
                 <a:solidFill>
-                  <a:srgbClr val="1F374E"/>
+                  <a:srgbClr val="202C3C"/>
                 </a:solidFill>
               </a:rPr>
-              <a:t>Was ist ein Netzwerk?</a:t>
+              <a:t>Netzwerk, LAN, WLAN</a:t>
             </a:r>
           </a:p>
         </p:txBody>
@@ -6944,7 +4628,7 @@
         <p:spPr>
           <a:xfrm>
             <a:off x="685800" y="1234440"/>
-            <a:ext cx="5303520" cy="4937760"/>
+            <a:ext cx="5394960" cy="5029200"/>
           </a:xfrm>
           <a:prstGeom prst="rect">
             <a:avLst/>
@@ -6959,401 +4643,75 @@
           <a:p>
             <a:pPr>
               <a:spcAft>
-                <a:spcPts val="800"/>
+                <a:spcPts val="700"/>
               </a:spcAft>
               <a:defRPr sz="1900">
                 <a:solidFill>
-                  <a:srgbClr val="232323"/>
+                  <a:srgbClr val="1E1E1E"/>
                 </a:solidFill>
               </a:defRPr>
             </a:pPr>
             <a:r>
-              <a:t>Ein Netzwerk verbindet Informatiksysteme.</a:t>
+              <a:t>Netzwerk verbindet Informatiksysteme.</a:t>
             </a:r>
           </a:p>
           <a:p>
             <a:pPr>
               <a:spcAft>
-                <a:spcPts val="800"/>
+                <a:spcPts val="700"/>
               </a:spcAft>
               <a:defRPr sz="1900">
                 <a:solidFill>
-                  <a:srgbClr val="232323"/>
+                  <a:srgbClr val="1E1E1E"/>
                 </a:solidFill>
               </a:defRPr>
             </a:pPr>
             <a:r>
-              <a:t>Geräte können Daten austauschen und Dienste nutzen.</a:t>
+              <a:t>LAN = Local Area Network.</a:t>
             </a:r>
           </a:p>
           <a:p>
             <a:pPr>
               <a:spcAft>
-                <a:spcPts val="800"/>
+                <a:spcPts val="700"/>
               </a:spcAft>
               <a:defRPr sz="1900">
                 <a:solidFill>
-                  <a:srgbClr val="232323"/>
+                  <a:srgbClr val="1E1E1E"/>
                 </a:solidFill>
               </a:defRPr>
             </a:pPr>
             <a:r>
-              <a:t>Beispiele: Schulnetz, Heimnetz, Internet.</a:t>
-            </a:r>
-          </a:p>
-        </p:txBody>
-      </p:sp>
-      <p:sp>
-        <p:nvSpPr>
-          <p:cNvPr id="5" name="Rounded Rectangle 4"/>
-          <p:cNvSpPr/>
-          <p:nvPr/>
-        </p:nvSpPr>
-        <p:spPr>
-          <a:xfrm>
-            <a:off x="6217920" y="1645920"/>
-            <a:ext cx="1143000" cy="731520"/>
-          </a:xfrm>
-          <a:prstGeom prst="roundRect">
-            <a:avLst/>
-          </a:prstGeom>
-          <a:solidFill>
-            <a:srgbClr val="F2F6FA"/>
-          </a:solidFill>
-          <a:ln>
-            <a:solidFill>
-              <a:srgbClr val="4472C4"/>
-            </a:solidFill>
-          </a:ln>
-        </p:spPr>
-        <p:style>
-          <a:lnRef idx="1">
-            <a:schemeClr val="accent1"/>
-          </a:lnRef>
-          <a:fillRef idx="3">
-            <a:schemeClr val="accent1"/>
-          </a:fillRef>
-          <a:effectRef idx="2">
-            <a:schemeClr val="accent1"/>
-          </a:effectRef>
-          <a:fontRef idx="minor">
-            <a:schemeClr val="lt1"/>
-          </a:fontRef>
-        </p:style>
-        <p:txBody>
-          <a:bodyPr rtlCol="0" anchor="ctr" wrap="square"/>
-          <a:lstStyle/>
-          <a:p>
-            <a:pPr algn="ctr"/>
-            <a:r>
-              <a:rPr sz="1100" b="1">
-                <a:solidFill>
-                  <a:srgbClr val="1F374E"/>
-                </a:solidFill>
-              </a:rPr>
-              <a:t>Endgerät</a:t>
-            </a:r>
-          </a:p>
-        </p:txBody>
-      </p:sp>
-      <p:sp>
-        <p:nvSpPr>
-          <p:cNvPr id="6" name="Right Arrow 5"/>
-          <p:cNvSpPr/>
-          <p:nvPr/>
-        </p:nvSpPr>
-        <p:spPr>
-          <a:xfrm>
-            <a:off x="7406640" y="1847088"/>
-            <a:ext cx="274320" cy="256032"/>
-          </a:xfrm>
-          <a:prstGeom prst="rightArrow">
-            <a:avLst/>
-          </a:prstGeom>
-          <a:solidFill>
-            <a:srgbClr val="4472C4"/>
-          </a:solidFill>
-          <a:ln>
-            <a:noFill/>
-          </a:ln>
-        </p:spPr>
-        <p:style>
-          <a:lnRef idx="1">
-            <a:schemeClr val="accent1"/>
-          </a:lnRef>
-          <a:fillRef idx="3">
-            <a:schemeClr val="accent1"/>
-          </a:fillRef>
-          <a:effectRef idx="2">
-            <a:schemeClr val="accent1"/>
-          </a:effectRef>
-          <a:fontRef idx="minor">
-            <a:schemeClr val="lt1"/>
-          </a:fontRef>
-        </p:style>
-        <p:txBody>
-          <a:bodyPr rtlCol="0" anchor="ctr"/>
-          <a:lstStyle/>
-          <a:p>
-            <a:pPr algn="ctr"/>
-          </a:p>
-        </p:txBody>
-      </p:sp>
-      <p:sp>
-        <p:nvSpPr>
-          <p:cNvPr id="7" name="Rounded Rectangle 6"/>
-          <p:cNvSpPr/>
-          <p:nvPr/>
-        </p:nvSpPr>
-        <p:spPr>
-          <a:xfrm>
-            <a:off x="7635240" y="1645920"/>
-            <a:ext cx="1508760" cy="731520"/>
-          </a:xfrm>
-          <a:prstGeom prst="roundRect">
-            <a:avLst/>
-          </a:prstGeom>
-          <a:solidFill>
-            <a:srgbClr val="DCE6F1"/>
-          </a:solidFill>
-          <a:ln>
-            <a:solidFill>
-              <a:srgbClr val="4472C4"/>
-            </a:solidFill>
-          </a:ln>
-        </p:spPr>
-        <p:style>
-          <a:lnRef idx="1">
-            <a:schemeClr val="accent1"/>
-          </a:lnRef>
-          <a:fillRef idx="3">
-            <a:schemeClr val="accent1"/>
-          </a:fillRef>
-          <a:effectRef idx="2">
-            <a:schemeClr val="accent1"/>
-          </a:effectRef>
-          <a:fontRef idx="minor">
-            <a:schemeClr val="lt1"/>
-          </a:fontRef>
-        </p:style>
-        <p:txBody>
-          <a:bodyPr rtlCol="0" anchor="ctr" wrap="square"/>
-          <a:lstStyle/>
-          <a:p>
-            <a:pPr algn="ctr"/>
-            <a:r>
-              <a:rPr sz="1100" b="1">
-                <a:solidFill>
-                  <a:srgbClr val="1F374E"/>
-                </a:solidFill>
-              </a:rPr>
-              <a:t>Switch / Access Point</a:t>
-            </a:r>
-          </a:p>
-        </p:txBody>
-      </p:sp>
-      <p:sp>
-        <p:nvSpPr>
-          <p:cNvPr id="8" name="Right Arrow 7"/>
-          <p:cNvSpPr/>
-          <p:nvPr/>
-        </p:nvSpPr>
-        <p:spPr>
-          <a:xfrm>
-            <a:off x="9189720" y="1847088"/>
-            <a:ext cx="274320" cy="256032"/>
-          </a:xfrm>
-          <a:prstGeom prst="rightArrow">
-            <a:avLst/>
-          </a:prstGeom>
-          <a:solidFill>
-            <a:srgbClr val="4472C4"/>
-          </a:solidFill>
-          <a:ln>
-            <a:noFill/>
-          </a:ln>
-        </p:spPr>
-        <p:style>
-          <a:lnRef idx="1">
-            <a:schemeClr val="accent1"/>
-          </a:lnRef>
-          <a:fillRef idx="3">
-            <a:schemeClr val="accent1"/>
-          </a:fillRef>
-          <a:effectRef idx="2">
-            <a:schemeClr val="accent1"/>
-          </a:effectRef>
-          <a:fontRef idx="minor">
-            <a:schemeClr val="lt1"/>
-          </a:fontRef>
-        </p:style>
-        <p:txBody>
-          <a:bodyPr rtlCol="0" anchor="ctr"/>
-          <a:lstStyle/>
-          <a:p>
-            <a:pPr algn="ctr"/>
-          </a:p>
-        </p:txBody>
-      </p:sp>
-      <p:sp>
-        <p:nvSpPr>
-          <p:cNvPr id="9" name="Rounded Rectangle 8"/>
-          <p:cNvSpPr/>
-          <p:nvPr/>
-        </p:nvSpPr>
-        <p:spPr>
-          <a:xfrm>
-            <a:off x="9372600" y="1645920"/>
-            <a:ext cx="1051560" cy="731520"/>
-          </a:xfrm>
-          <a:prstGeom prst="roundRect">
-            <a:avLst/>
-          </a:prstGeom>
-          <a:solidFill>
-            <a:srgbClr val="FFE699"/>
-          </a:solidFill>
-          <a:ln>
-            <a:solidFill>
-              <a:srgbClr val="4472C4"/>
-            </a:solidFill>
-          </a:ln>
-        </p:spPr>
-        <p:style>
-          <a:lnRef idx="1">
-            <a:schemeClr val="accent1"/>
-          </a:lnRef>
-          <a:fillRef idx="3">
-            <a:schemeClr val="accent1"/>
-          </a:fillRef>
-          <a:effectRef idx="2">
-            <a:schemeClr val="accent1"/>
-          </a:effectRef>
-          <a:fontRef idx="minor">
-            <a:schemeClr val="lt1"/>
-          </a:fontRef>
-        </p:style>
-        <p:txBody>
-          <a:bodyPr rtlCol="0" anchor="ctr" wrap="square"/>
-          <a:lstStyle/>
-          <a:p>
-            <a:pPr algn="ctr"/>
-            <a:r>
-              <a:rPr sz="1100" b="1">
-                <a:solidFill>
-                  <a:srgbClr val="1F374E"/>
-                </a:solidFill>
-              </a:rPr>
-              <a:t>Router</a:t>
-            </a:r>
-          </a:p>
-        </p:txBody>
-      </p:sp>
-      <p:sp>
-        <p:nvSpPr>
-          <p:cNvPr id="10" name="Right Arrow 9"/>
-          <p:cNvSpPr/>
-          <p:nvPr/>
-        </p:nvSpPr>
-        <p:spPr>
-          <a:xfrm>
-            <a:off x="10469880" y="1847088"/>
-            <a:ext cx="274320" cy="256032"/>
-          </a:xfrm>
-          <a:prstGeom prst="rightArrow">
-            <a:avLst/>
-          </a:prstGeom>
-          <a:solidFill>
-            <a:srgbClr val="4472C4"/>
-          </a:solidFill>
-          <a:ln>
-            <a:noFill/>
-          </a:ln>
-        </p:spPr>
-        <p:style>
-          <a:lnRef idx="1">
-            <a:schemeClr val="accent1"/>
-          </a:lnRef>
-          <a:fillRef idx="3">
-            <a:schemeClr val="accent1"/>
-          </a:fillRef>
-          <a:effectRef idx="2">
-            <a:schemeClr val="accent1"/>
-          </a:effectRef>
-          <a:fontRef idx="minor">
-            <a:schemeClr val="lt1"/>
-          </a:fontRef>
-        </p:style>
-        <p:txBody>
-          <a:bodyPr rtlCol="0" anchor="ctr"/>
-          <a:lstStyle/>
-          <a:p>
-            <a:pPr algn="ctr"/>
-          </a:p>
-        </p:txBody>
-      </p:sp>
-      <p:sp>
-        <p:nvSpPr>
-          <p:cNvPr id="11" name="Rounded Rectangle 10"/>
-          <p:cNvSpPr/>
-          <p:nvPr/>
-        </p:nvSpPr>
-        <p:spPr>
-          <a:xfrm>
-            <a:off x="10698480" y="1645920"/>
-            <a:ext cx="1005840" cy="731520"/>
-          </a:xfrm>
-          <a:prstGeom prst="roundRect">
-            <a:avLst/>
-          </a:prstGeom>
-          <a:solidFill>
-            <a:srgbClr val="E2EFDA"/>
-          </a:solidFill>
-          <a:ln>
-            <a:solidFill>
-              <a:srgbClr val="4472C4"/>
-            </a:solidFill>
-          </a:ln>
-        </p:spPr>
-        <p:style>
-          <a:lnRef idx="1">
-            <a:schemeClr val="accent1"/>
-          </a:lnRef>
-          <a:fillRef idx="3">
-            <a:schemeClr val="accent1"/>
-          </a:fillRef>
-          <a:effectRef idx="2">
-            <a:schemeClr val="accent1"/>
-          </a:effectRef>
-          <a:fontRef idx="minor">
-            <a:schemeClr val="lt1"/>
-          </a:fontRef>
-        </p:style>
-        <p:txBody>
-          <a:bodyPr rtlCol="0" anchor="ctr" wrap="square"/>
-          <a:lstStyle/>
-          <a:p>
-            <a:pPr algn="ctr"/>
-            <a:r>
-              <a:rPr sz="1100" b="1">
-                <a:solidFill>
-                  <a:srgbClr val="1F374E"/>
-                </a:solidFill>
-              </a:rPr>
-              <a:t>Server</a:t>
-            </a:r>
-          </a:p>
-        </p:txBody>
-      </p:sp>
-      <p:sp>
-        <p:nvSpPr>
-          <p:cNvPr id="12" name="TextBox 11"/>
+              <a:t>WLAN = Wireless Local Area Network.</a:t>
+            </a:r>
+          </a:p>
+          <a:p>
+            <a:pPr>
+              <a:spcAft>
+                <a:spcPts val="700"/>
+              </a:spcAft>
+              <a:defRPr sz="1900">
+                <a:solidFill>
+                  <a:srgbClr val="1E1E1E"/>
+                </a:solidFill>
+              </a:defRPr>
+            </a:pPr>
+            <a:r>
+              <a:t>WLAN ist nicht dasselbe wie Internet.</a:t>
+            </a:r>
+          </a:p>
+        </p:txBody>
+      </p:sp>
+      <p:sp>
+        <p:nvSpPr>
+          <p:cNvPr id="5" name="TextBox 4"/>
           <p:cNvSpPr txBox="1"/>
           <p:nvPr/>
         </p:nvSpPr>
         <p:spPr>
           <a:xfrm>
-            <a:off x="502920" y="6510528"/>
-            <a:ext cx="11064240" cy="182880"/>
+            <a:off x="365760" y="6510528"/>
+            <a:ext cx="11430000" cy="228600"/>
           </a:xfrm>
           <a:prstGeom prst="rect">
             <a:avLst/>
@@ -7370,7 +4728,7 @@
             <a:r>
               <a:rPr sz="800">
                 <a:solidFill>
-                  <a:srgbClr val="646464"/>
+                  <a:srgbClr val="6E6E6E"/>
                 </a:solidFill>
               </a:rPr>
               <a:t>Grafik: eigene Darstellung</a:t>
@@ -7405,13 +4763,13 @@
         <p:spPr>
           <a:xfrm>
             <a:off x="0" y="0"/>
-            <a:ext cx="12191695" cy="100584"/>
+            <a:ext cx="12191695" cy="109728"/>
           </a:xfrm>
           <a:prstGeom prst="rect">
             <a:avLst/>
           </a:prstGeom>
           <a:solidFill>
-            <a:srgbClr val="4472C4"/>
+            <a:srgbClr val="305396"/>
           </a:solidFill>
           <a:ln>
             <a:noFill/>
@@ -7448,7 +4806,7 @@
         <p:spPr>
           <a:xfrm>
             <a:off x="594360" y="320040"/>
-            <a:ext cx="10972800" cy="502920"/>
+            <a:ext cx="10972800" cy="548640"/>
           </a:xfrm>
           <a:prstGeom prst="rect">
             <a:avLst/>
@@ -7464,10 +4822,10 @@
             <a:r>
               <a:rPr sz="2600" b="1">
                 <a:solidFill>
-                  <a:srgbClr val="1F374E"/>
+                  <a:srgbClr val="202C3C"/>
                 </a:solidFill>
               </a:rPr>
-              <a:t>LAN und WLAN</a:t>
+              <a:t>Geräte und Rollen</a:t>
             </a:r>
           </a:p>
         </p:txBody>
@@ -7481,7 +4839,7 @@
         <p:spPr>
           <a:xfrm>
             <a:off x="685800" y="1234440"/>
-            <a:ext cx="5303520" cy="4937760"/>
+            <a:ext cx="5394960" cy="5029200"/>
           </a:xfrm>
           <a:prstGeom prst="rect">
             <a:avLst/>
@@ -7496,46 +4854,76 @@
           <a:p>
             <a:pPr>
               <a:spcAft>
-                <a:spcPts val="800"/>
+                <a:spcPts val="700"/>
               </a:spcAft>
               <a:defRPr sz="1900">
                 <a:solidFill>
-                  <a:srgbClr val="232323"/>
+                  <a:srgbClr val="1E1E1E"/>
                 </a:solidFill>
               </a:defRPr>
             </a:pPr>
             <a:r>
-              <a:t>LAN = Local Area Network: lokales Netzwerk in einem begrenzten Bereich.</a:t>
+              <a:t>Client nutzt einen Dienst.</a:t>
             </a:r>
           </a:p>
           <a:p>
             <a:pPr>
               <a:spcAft>
-                <a:spcPts val="800"/>
+                <a:spcPts val="700"/>
               </a:spcAft>
               <a:defRPr sz="1900">
                 <a:solidFill>
-                  <a:srgbClr val="232323"/>
+                  <a:srgbClr val="1E1E1E"/>
                 </a:solidFill>
               </a:defRPr>
             </a:pPr>
             <a:r>
-              <a:t>WLAN = Wireless Local Area Network: drahtloser Zugang zu einem lokalen Netzwerk.</a:t>
+              <a:t>Server stellt einen Dienst bereit.</a:t>
             </a:r>
           </a:p>
           <a:p>
             <a:pPr>
               <a:spcAft>
-                <a:spcPts val="800"/>
+                <a:spcPts val="700"/>
               </a:spcAft>
               <a:defRPr sz="1900">
                 <a:solidFill>
-                  <a:srgbClr val="232323"/>
+                  <a:srgbClr val="1E1E1E"/>
                 </a:solidFill>
               </a:defRPr>
             </a:pPr>
             <a:r>
-              <a:t>WLAN ist nicht dasselbe wie Internet.</a:t>
+              <a:t>Switch verbindet Geräte im lokalen Kabelnetz.</a:t>
+            </a:r>
+          </a:p>
+          <a:p>
+            <a:pPr>
+              <a:spcAft>
+                <a:spcPts val="700"/>
+              </a:spcAft>
+              <a:defRPr sz="1900">
+                <a:solidFill>
+                  <a:srgbClr val="1E1E1E"/>
+                </a:solidFill>
+              </a:defRPr>
+            </a:pPr>
+            <a:r>
+              <a:t>Access Point ermöglicht WLAN.</a:t>
+            </a:r>
+          </a:p>
+          <a:p>
+            <a:pPr>
+              <a:spcAft>
+                <a:spcPts val="700"/>
+              </a:spcAft>
+              <a:defRPr sz="1900">
+                <a:solidFill>
+                  <a:srgbClr val="1E1E1E"/>
+                </a:solidFill>
+              </a:defRPr>
+            </a:pPr>
+            <a:r>
+              <a:t>Router verbindet Netze.</a:t>
             </a:r>
           </a:p>
         </p:txBody>
@@ -7548,18 +4936,18 @@
         </p:nvSpPr>
         <p:spPr>
           <a:xfrm>
-            <a:off x="6217920" y="1645920"/>
-            <a:ext cx="1143000" cy="731520"/>
+            <a:off x="6217920" y="1463040"/>
+            <a:ext cx="1371600" cy="731520"/>
           </a:xfrm>
           <a:prstGeom prst="roundRect">
             <a:avLst/>
           </a:prstGeom>
           <a:solidFill>
-            <a:srgbClr val="F2F6FA"/>
+            <a:srgbClr val="E5ECF6"/>
           </a:solidFill>
           <a:ln>
             <a:solidFill>
-              <a:srgbClr val="4472C4"/>
+              <a:srgbClr val="305396"/>
             </a:solidFill>
           </a:ln>
         </p:spPr>
@@ -7583,35 +4971,37 @@
           <a:p>
             <a:pPr algn="ctr"/>
             <a:r>
-              <a:rPr sz="1100" b="1">
-                <a:solidFill>
-                  <a:srgbClr val="1F374E"/>
+              <a:rPr sz="1600" b="1">
+                <a:solidFill>
+                  <a:srgbClr val="202C3C"/>
                 </a:solidFill>
               </a:rPr>
-              <a:t>Endgerät</a:t>
-            </a:r>
-          </a:p>
-        </p:txBody>
-      </p:sp>
-      <p:sp>
-        <p:nvSpPr>
-          <p:cNvPr id="6" name="Right Arrow 5"/>
+              <a:t>Client</a:t>
+            </a:r>
+          </a:p>
+        </p:txBody>
+      </p:sp>
+      <p:sp>
+        <p:nvSpPr>
+          <p:cNvPr id="6" name="Rounded Rectangle 5"/>
           <p:cNvSpPr/>
           <p:nvPr/>
         </p:nvSpPr>
         <p:spPr>
           <a:xfrm>
-            <a:off x="7406640" y="1847088"/>
-            <a:ext cx="274320" cy="256032"/>
-          </a:xfrm>
-          <a:prstGeom prst="rightArrow">
+            <a:off x="7863840" y="1463040"/>
+            <a:ext cx="1645920" cy="731520"/>
+          </a:xfrm>
+          <a:prstGeom prst="roundRect">
             <a:avLst/>
           </a:prstGeom>
           <a:solidFill>
-            <a:srgbClr val="4472C4"/>
+            <a:srgbClr val="FFE899"/>
           </a:solidFill>
           <a:ln>
-            <a:noFill/>
+            <a:solidFill>
+              <a:srgbClr val="305396"/>
+            </a:solidFill>
           </a:ln>
         </p:spPr>
         <p:style>
@@ -7629,10 +5019,18 @@
           </a:fontRef>
         </p:style>
         <p:txBody>
-          <a:bodyPr rtlCol="0" anchor="ctr"/>
+          <a:bodyPr rtlCol="0" anchor="ctr" wrap="square"/>
           <a:lstStyle/>
           <a:p>
             <a:pPr algn="ctr"/>
+            <a:r>
+              <a:rPr sz="1600" b="1">
+                <a:solidFill>
+                  <a:srgbClr val="202C3C"/>
+                </a:solidFill>
+              </a:rPr>
+              <a:t>Switch/AP</a:t>
+            </a:r>
           </a:p>
         </p:txBody>
       </p:sp>
@@ -7644,18 +5042,18 @@
         </p:nvSpPr>
         <p:spPr>
           <a:xfrm>
-            <a:off x="7635240" y="1645920"/>
-            <a:ext cx="1508760" cy="731520"/>
+            <a:off x="9784080" y="1463040"/>
+            <a:ext cx="1371600" cy="731520"/>
           </a:xfrm>
           <a:prstGeom prst="roundRect">
             <a:avLst/>
           </a:prstGeom>
           <a:solidFill>
-            <a:srgbClr val="DCE6F1"/>
+            <a:srgbClr val="DDEEDD"/>
           </a:solidFill>
           <a:ln>
             <a:solidFill>
-              <a:srgbClr val="4472C4"/>
+              <a:srgbClr val="305396"/>
             </a:solidFill>
           </a:ln>
         </p:spPr>
@@ -7679,201 +5077,9 @@
           <a:p>
             <a:pPr algn="ctr"/>
             <a:r>
-              <a:rPr sz="1100" b="1">
-                <a:solidFill>
-                  <a:srgbClr val="1F374E"/>
-                </a:solidFill>
-              </a:rPr>
-              <a:t>Switch / Access Point</a:t>
-            </a:r>
-          </a:p>
-        </p:txBody>
-      </p:sp>
-      <p:sp>
-        <p:nvSpPr>
-          <p:cNvPr id="8" name="Right Arrow 7"/>
-          <p:cNvSpPr/>
-          <p:nvPr/>
-        </p:nvSpPr>
-        <p:spPr>
-          <a:xfrm>
-            <a:off x="9189720" y="1847088"/>
-            <a:ext cx="274320" cy="256032"/>
-          </a:xfrm>
-          <a:prstGeom prst="rightArrow">
-            <a:avLst/>
-          </a:prstGeom>
-          <a:solidFill>
-            <a:srgbClr val="4472C4"/>
-          </a:solidFill>
-          <a:ln>
-            <a:noFill/>
-          </a:ln>
-        </p:spPr>
-        <p:style>
-          <a:lnRef idx="1">
-            <a:schemeClr val="accent1"/>
-          </a:lnRef>
-          <a:fillRef idx="3">
-            <a:schemeClr val="accent1"/>
-          </a:fillRef>
-          <a:effectRef idx="2">
-            <a:schemeClr val="accent1"/>
-          </a:effectRef>
-          <a:fontRef idx="minor">
-            <a:schemeClr val="lt1"/>
-          </a:fontRef>
-        </p:style>
-        <p:txBody>
-          <a:bodyPr rtlCol="0" anchor="ctr"/>
-          <a:lstStyle/>
-          <a:p>
-            <a:pPr algn="ctr"/>
-          </a:p>
-        </p:txBody>
-      </p:sp>
-      <p:sp>
-        <p:nvSpPr>
-          <p:cNvPr id="9" name="Rounded Rectangle 8"/>
-          <p:cNvSpPr/>
-          <p:nvPr/>
-        </p:nvSpPr>
-        <p:spPr>
-          <a:xfrm>
-            <a:off x="9372600" y="1645920"/>
-            <a:ext cx="1051560" cy="731520"/>
-          </a:xfrm>
-          <a:prstGeom prst="roundRect">
-            <a:avLst/>
-          </a:prstGeom>
-          <a:solidFill>
-            <a:srgbClr val="FFE699"/>
-          </a:solidFill>
-          <a:ln>
-            <a:solidFill>
-              <a:srgbClr val="4472C4"/>
-            </a:solidFill>
-          </a:ln>
-        </p:spPr>
-        <p:style>
-          <a:lnRef idx="1">
-            <a:schemeClr val="accent1"/>
-          </a:lnRef>
-          <a:fillRef idx="3">
-            <a:schemeClr val="accent1"/>
-          </a:fillRef>
-          <a:effectRef idx="2">
-            <a:schemeClr val="accent1"/>
-          </a:effectRef>
-          <a:fontRef idx="minor">
-            <a:schemeClr val="lt1"/>
-          </a:fontRef>
-        </p:style>
-        <p:txBody>
-          <a:bodyPr rtlCol="0" anchor="ctr" wrap="square"/>
-          <a:lstStyle/>
-          <a:p>
-            <a:pPr algn="ctr"/>
-            <a:r>
-              <a:rPr sz="1100" b="1">
-                <a:solidFill>
-                  <a:srgbClr val="1F374E"/>
-                </a:solidFill>
-              </a:rPr>
-              <a:t>Router</a:t>
-            </a:r>
-          </a:p>
-        </p:txBody>
-      </p:sp>
-      <p:sp>
-        <p:nvSpPr>
-          <p:cNvPr id="10" name="Right Arrow 9"/>
-          <p:cNvSpPr/>
-          <p:nvPr/>
-        </p:nvSpPr>
-        <p:spPr>
-          <a:xfrm>
-            <a:off x="10469880" y="1847088"/>
-            <a:ext cx="274320" cy="256032"/>
-          </a:xfrm>
-          <a:prstGeom prst="rightArrow">
-            <a:avLst/>
-          </a:prstGeom>
-          <a:solidFill>
-            <a:srgbClr val="4472C4"/>
-          </a:solidFill>
-          <a:ln>
-            <a:noFill/>
-          </a:ln>
-        </p:spPr>
-        <p:style>
-          <a:lnRef idx="1">
-            <a:schemeClr val="accent1"/>
-          </a:lnRef>
-          <a:fillRef idx="3">
-            <a:schemeClr val="accent1"/>
-          </a:fillRef>
-          <a:effectRef idx="2">
-            <a:schemeClr val="accent1"/>
-          </a:effectRef>
-          <a:fontRef idx="minor">
-            <a:schemeClr val="lt1"/>
-          </a:fontRef>
-        </p:style>
-        <p:txBody>
-          <a:bodyPr rtlCol="0" anchor="ctr"/>
-          <a:lstStyle/>
-          <a:p>
-            <a:pPr algn="ctr"/>
-          </a:p>
-        </p:txBody>
-      </p:sp>
-      <p:sp>
-        <p:nvSpPr>
-          <p:cNvPr id="11" name="Rounded Rectangle 10"/>
-          <p:cNvSpPr/>
-          <p:nvPr/>
-        </p:nvSpPr>
-        <p:spPr>
-          <a:xfrm>
-            <a:off x="10698480" y="1645920"/>
-            <a:ext cx="1005840" cy="731520"/>
-          </a:xfrm>
-          <a:prstGeom prst="roundRect">
-            <a:avLst/>
-          </a:prstGeom>
-          <a:solidFill>
-            <a:srgbClr val="E2EFDA"/>
-          </a:solidFill>
-          <a:ln>
-            <a:solidFill>
-              <a:srgbClr val="4472C4"/>
-            </a:solidFill>
-          </a:ln>
-        </p:spPr>
-        <p:style>
-          <a:lnRef idx="1">
-            <a:schemeClr val="accent1"/>
-          </a:lnRef>
-          <a:fillRef idx="3">
-            <a:schemeClr val="accent1"/>
-          </a:fillRef>
-          <a:effectRef idx="2">
-            <a:schemeClr val="accent1"/>
-          </a:effectRef>
-          <a:fontRef idx="minor">
-            <a:schemeClr val="lt1"/>
-          </a:fontRef>
-        </p:style>
-        <p:txBody>
-          <a:bodyPr rtlCol="0" anchor="ctr" wrap="square"/>
-          <a:lstStyle/>
-          <a:p>
-            <a:pPr algn="ctr"/>
-            <a:r>
-              <a:rPr sz="1100" b="1">
-                <a:solidFill>
-                  <a:srgbClr val="1F374E"/>
+              <a:rPr sz="1600" b="1">
+                <a:solidFill>
+                  <a:srgbClr val="202C3C"/>
                 </a:solidFill>
               </a:rPr>
               <a:t>Server</a:t>
@@ -7883,14 +5089,14 @@
       </p:sp>
       <p:sp>
         <p:nvSpPr>
-          <p:cNvPr id="12" name="TextBox 11"/>
+          <p:cNvPr id="8" name="TextBox 7"/>
           <p:cNvSpPr txBox="1"/>
           <p:nvPr/>
         </p:nvSpPr>
         <p:spPr>
           <a:xfrm>
-            <a:off x="502920" y="6510528"/>
-            <a:ext cx="11064240" cy="182880"/>
+            <a:off x="365760" y="6510528"/>
+            <a:ext cx="11430000" cy="228600"/>
           </a:xfrm>
           <a:prstGeom prst="rect">
             <a:avLst/>
@@ -7907,7 +5113,7 @@
             <a:r>
               <a:rPr sz="800">
                 <a:solidFill>
-                  <a:srgbClr val="646464"/>
+                  <a:srgbClr val="6E6E6E"/>
                 </a:solidFill>
               </a:rPr>
               <a:t>Grafik: eigene Darstellung</a:t>
@@ -7942,13 +5148,13 @@
         <p:spPr>
           <a:xfrm>
             <a:off x="0" y="0"/>
-            <a:ext cx="12191695" cy="100584"/>
+            <a:ext cx="12191695" cy="109728"/>
           </a:xfrm>
           <a:prstGeom prst="rect">
             <a:avLst/>
           </a:prstGeom>
           <a:solidFill>
-            <a:srgbClr val="4472C4"/>
+            <a:srgbClr val="305396"/>
           </a:solidFill>
           <a:ln>
             <a:noFill/>
@@ -7985,7 +5191,7 @@
         <p:spPr>
           <a:xfrm>
             <a:off x="594360" y="320040"/>
-            <a:ext cx="10972800" cy="502920"/>
+            <a:ext cx="10972800" cy="548640"/>
           </a:xfrm>
           <a:prstGeom prst="rect">
             <a:avLst/>
@@ -8001,10 +5207,10 @@
             <a:r>
               <a:rPr sz="2600" b="1">
                 <a:solidFill>
-                  <a:srgbClr val="1F374E"/>
+                  <a:srgbClr val="202C3C"/>
                 </a:solidFill>
               </a:rPr>
-              <a:t>Client, Server, Switch, Access Point, Router</a:t>
+              <a:t>IP-Adresse und DNS</a:t>
             </a:r>
           </a:p>
         </p:txBody>
@@ -8018,7 +5224,7 @@
         <p:spPr>
           <a:xfrm>
             <a:off x="685800" y="1234440"/>
-            <a:ext cx="5303520" cy="4937760"/>
+            <a:ext cx="5394960" cy="5029200"/>
           </a:xfrm>
           <a:prstGeom prst="rect">
             <a:avLst/>
@@ -8033,100 +5239,85 @@
           <a:p>
             <a:pPr>
               <a:spcAft>
-                <a:spcPts val="800"/>
+                <a:spcPts val="700"/>
               </a:spcAft>
               <a:defRPr sz="1900">
                 <a:solidFill>
-                  <a:srgbClr val="232323"/>
+                  <a:srgbClr val="1E1E1E"/>
                 </a:solidFill>
               </a:defRPr>
             </a:pPr>
             <a:r>
-              <a:t>Client: nutzt einen Dienst.</a:t>
+              <a:t>IP = Internet Protocol</a:t>
             </a:r>
           </a:p>
           <a:p>
             <a:pPr>
               <a:spcAft>
-                <a:spcPts val="800"/>
+                <a:spcPts val="700"/>
               </a:spcAft>
               <a:defRPr sz="1900">
                 <a:solidFill>
-                  <a:srgbClr val="232323"/>
+                  <a:srgbClr val="1E1E1E"/>
                 </a:solidFill>
               </a:defRPr>
             </a:pPr>
             <a:r>
-              <a:t>Server: stellt einen Dienst bereit.</a:t>
+              <a:t>IP-Adresse adressiert Geräte im Netzwerk.</a:t>
             </a:r>
           </a:p>
           <a:p>
             <a:pPr>
               <a:spcAft>
-                <a:spcPts val="800"/>
+                <a:spcPts val="700"/>
               </a:spcAft>
               <a:defRPr sz="1900">
                 <a:solidFill>
-                  <a:srgbClr val="232323"/>
+                  <a:srgbClr val="1E1E1E"/>
                 </a:solidFill>
               </a:defRPr>
             </a:pPr>
             <a:r>
-              <a:t>Switch: verbindet Geräte im lokalen kabelgebundenen Netz.</a:t>
+              <a:t>DNS = Domain Name System.</a:t>
             </a:r>
           </a:p>
           <a:p>
             <a:pPr>
               <a:spcAft>
-                <a:spcPts val="800"/>
+                <a:spcPts val="700"/>
               </a:spcAft>
               <a:defRPr sz="1900">
                 <a:solidFill>
-                  <a:srgbClr val="232323"/>
+                  <a:srgbClr val="1E1E1E"/>
                 </a:solidFill>
               </a:defRPr>
             </a:pPr>
             <a:r>
-              <a:t>Access Point: ermöglicht drahtlosen WLAN-Zugang.</a:t>
-            </a:r>
-          </a:p>
-          <a:p>
-            <a:pPr>
-              <a:spcAft>
-                <a:spcPts val="800"/>
-              </a:spcAft>
-              <a:defRPr sz="1900">
-                <a:solidFill>
-                  <a:srgbClr val="232323"/>
-                </a:solidFill>
-              </a:defRPr>
-            </a:pPr>
-            <a:r>
-              <a:t>Router: verbindet unterschiedliche Netze.</a:t>
-            </a:r>
-          </a:p>
-        </p:txBody>
-      </p:sp>
-      <p:sp>
-        <p:nvSpPr>
-          <p:cNvPr id="5" name="Rounded Rectangle 4"/>
+              <a:t>DNS ordnet Namen passenden IP-Adressen zu.</a:t>
+            </a:r>
+          </a:p>
+        </p:txBody>
+      </p:sp>
+      <p:sp>
+        <p:nvSpPr>
+          <p:cNvPr id="5" name="Rectangle 4"/>
           <p:cNvSpPr/>
           <p:nvPr/>
         </p:nvSpPr>
         <p:spPr>
           <a:xfrm>
-            <a:off x="6217920" y="1554480"/>
-            <a:ext cx="1143000" cy="731520"/>
-          </a:xfrm>
-          <a:prstGeom prst="roundRect">
+            <a:off x="6492240" y="1645920"/>
+            <a:ext cx="4572000" cy="2377440"/>
+          </a:xfrm>
+          <a:prstGeom prst="rect">
             <a:avLst/>
           </a:prstGeom>
           <a:solidFill>
-            <a:srgbClr val="F2F6FA"/>
+            <a:srgbClr val="FCFCFC"/>
           </a:solidFill>
           <a:ln>
             <a:solidFill>
-              <a:srgbClr val="4472C4"/>
+              <a:srgbClr val="6E6E6E"/>
             </a:solidFill>
           </a:ln>
         </p:spPr>
@@ -8145,319 +5336,34 @@
           </a:fontRef>
         </p:style>
         <p:txBody>
-          <a:bodyPr rtlCol="0" anchor="ctr" wrap="square"/>
+          <a:bodyPr rtlCol="0" anchor="ctr" wrap="none"/>
           <a:lstStyle/>
           <a:p>
             <a:pPr algn="ctr"/>
             <a:r>
-              <a:rPr sz="1100" b="1">
-                <a:solidFill>
-                  <a:srgbClr val="1F374E"/>
-                </a:solidFill>
+              <a:rPr sz="1800">
+                <a:solidFill>
+                  <a:srgbClr val="1E1E1E"/>
+                </a:solidFill>
+                <a:latin typeface="Consolas"/>
               </a:rPr>
-              <a:t>Endgerät</a:t>
-            </a:r>
-          </a:p>
-        </p:txBody>
-      </p:sp>
-      <p:sp>
-        <p:nvSpPr>
-          <p:cNvPr id="6" name="Right Arrow 5"/>
-          <p:cNvSpPr/>
-          <p:nvPr/>
-        </p:nvSpPr>
-        <p:spPr>
-          <a:xfrm>
-            <a:off x="7406640" y="1755648"/>
-            <a:ext cx="274320" cy="256032"/>
-          </a:xfrm>
-          <a:prstGeom prst="rightArrow">
-            <a:avLst/>
-          </a:prstGeom>
-          <a:solidFill>
-            <a:srgbClr val="4472C4"/>
-          </a:solidFill>
-          <a:ln>
-            <a:noFill/>
-          </a:ln>
-        </p:spPr>
-        <p:style>
-          <a:lnRef idx="1">
-            <a:schemeClr val="accent1"/>
-          </a:lnRef>
-          <a:fillRef idx="3">
-            <a:schemeClr val="accent1"/>
-          </a:fillRef>
-          <a:effectRef idx="2">
-            <a:schemeClr val="accent1"/>
-          </a:effectRef>
-          <a:fontRef idx="minor">
-            <a:schemeClr val="lt1"/>
-          </a:fontRef>
-        </p:style>
-        <p:txBody>
-          <a:bodyPr rtlCol="0" anchor="ctr"/>
-          <a:lstStyle/>
-          <a:p>
-            <a:pPr algn="ctr"/>
-          </a:p>
-        </p:txBody>
-      </p:sp>
-      <p:sp>
-        <p:nvSpPr>
-          <p:cNvPr id="7" name="Rounded Rectangle 6"/>
-          <p:cNvSpPr/>
-          <p:nvPr/>
-        </p:nvSpPr>
-        <p:spPr>
-          <a:xfrm>
-            <a:off x="7635240" y="1554480"/>
-            <a:ext cx="1508760" cy="731520"/>
-          </a:xfrm>
-          <a:prstGeom prst="roundRect">
-            <a:avLst/>
-          </a:prstGeom>
-          <a:solidFill>
-            <a:srgbClr val="DCE6F1"/>
-          </a:solidFill>
-          <a:ln>
-            <a:solidFill>
-              <a:srgbClr val="4472C4"/>
-            </a:solidFill>
-          </a:ln>
-        </p:spPr>
-        <p:style>
-          <a:lnRef idx="1">
-            <a:schemeClr val="accent1"/>
-          </a:lnRef>
-          <a:fillRef idx="3">
-            <a:schemeClr val="accent1"/>
-          </a:fillRef>
-          <a:effectRef idx="2">
-            <a:schemeClr val="accent1"/>
-          </a:effectRef>
-          <a:fontRef idx="minor">
-            <a:schemeClr val="lt1"/>
-          </a:fontRef>
-        </p:style>
-        <p:txBody>
-          <a:bodyPr rtlCol="0" anchor="ctr" wrap="square"/>
-          <a:lstStyle/>
-          <a:p>
-            <a:pPr algn="ctr"/>
-            <a:r>
-              <a:rPr sz="1100" b="1">
-                <a:solidFill>
-                  <a:srgbClr val="1F374E"/>
-                </a:solidFill>
-              </a:rPr>
-              <a:t>Switch / Access Point</a:t>
-            </a:r>
-          </a:p>
-        </p:txBody>
-      </p:sp>
-      <p:sp>
-        <p:nvSpPr>
-          <p:cNvPr id="8" name="Right Arrow 7"/>
-          <p:cNvSpPr/>
-          <p:nvPr/>
-        </p:nvSpPr>
-        <p:spPr>
-          <a:xfrm>
-            <a:off x="9189720" y="1755648"/>
-            <a:ext cx="274320" cy="256032"/>
-          </a:xfrm>
-          <a:prstGeom prst="rightArrow">
-            <a:avLst/>
-          </a:prstGeom>
-          <a:solidFill>
-            <a:srgbClr val="4472C4"/>
-          </a:solidFill>
-          <a:ln>
-            <a:noFill/>
-          </a:ln>
-        </p:spPr>
-        <p:style>
-          <a:lnRef idx="1">
-            <a:schemeClr val="accent1"/>
-          </a:lnRef>
-          <a:fillRef idx="3">
-            <a:schemeClr val="accent1"/>
-          </a:fillRef>
-          <a:effectRef idx="2">
-            <a:schemeClr val="accent1"/>
-          </a:effectRef>
-          <a:fontRef idx="minor">
-            <a:schemeClr val="lt1"/>
-          </a:fontRef>
-        </p:style>
-        <p:txBody>
-          <a:bodyPr rtlCol="0" anchor="ctr"/>
-          <a:lstStyle/>
-          <a:p>
-            <a:pPr algn="ctr"/>
-          </a:p>
-        </p:txBody>
-      </p:sp>
-      <p:sp>
-        <p:nvSpPr>
-          <p:cNvPr id="9" name="Rounded Rectangle 8"/>
-          <p:cNvSpPr/>
-          <p:nvPr/>
-        </p:nvSpPr>
-        <p:spPr>
-          <a:xfrm>
-            <a:off x="9372600" y="1554480"/>
-            <a:ext cx="1051560" cy="731520"/>
-          </a:xfrm>
-          <a:prstGeom prst="roundRect">
-            <a:avLst/>
-          </a:prstGeom>
-          <a:solidFill>
-            <a:srgbClr val="FFE699"/>
-          </a:solidFill>
-          <a:ln>
-            <a:solidFill>
-              <a:srgbClr val="4472C4"/>
-            </a:solidFill>
-          </a:ln>
-        </p:spPr>
-        <p:style>
-          <a:lnRef idx="1">
-            <a:schemeClr val="accent1"/>
-          </a:lnRef>
-          <a:fillRef idx="3">
-            <a:schemeClr val="accent1"/>
-          </a:fillRef>
-          <a:effectRef idx="2">
-            <a:schemeClr val="accent1"/>
-          </a:effectRef>
-          <a:fontRef idx="minor">
-            <a:schemeClr val="lt1"/>
-          </a:fontRef>
-        </p:style>
-        <p:txBody>
-          <a:bodyPr rtlCol="0" anchor="ctr" wrap="square"/>
-          <a:lstStyle/>
-          <a:p>
-            <a:pPr algn="ctr"/>
-            <a:r>
-              <a:rPr sz="1100" b="1">
-                <a:solidFill>
-                  <a:srgbClr val="1F374E"/>
-                </a:solidFill>
-              </a:rPr>
-              <a:t>Router</a:t>
-            </a:r>
-          </a:p>
-        </p:txBody>
-      </p:sp>
-      <p:sp>
-        <p:nvSpPr>
-          <p:cNvPr id="10" name="Right Arrow 9"/>
-          <p:cNvSpPr/>
-          <p:nvPr/>
-        </p:nvSpPr>
-        <p:spPr>
-          <a:xfrm>
-            <a:off x="10469880" y="1755648"/>
-            <a:ext cx="274320" cy="256032"/>
-          </a:xfrm>
-          <a:prstGeom prst="rightArrow">
-            <a:avLst/>
-          </a:prstGeom>
-          <a:solidFill>
-            <a:srgbClr val="4472C4"/>
-          </a:solidFill>
-          <a:ln>
-            <a:noFill/>
-          </a:ln>
-        </p:spPr>
-        <p:style>
-          <a:lnRef idx="1">
-            <a:schemeClr val="accent1"/>
-          </a:lnRef>
-          <a:fillRef idx="3">
-            <a:schemeClr val="accent1"/>
-          </a:fillRef>
-          <a:effectRef idx="2">
-            <a:schemeClr val="accent1"/>
-          </a:effectRef>
-          <a:fontRef idx="minor">
-            <a:schemeClr val="lt1"/>
-          </a:fontRef>
-        </p:style>
-        <p:txBody>
-          <a:bodyPr rtlCol="0" anchor="ctr"/>
-          <a:lstStyle/>
-          <a:p>
-            <a:pPr algn="ctr"/>
-          </a:p>
-        </p:txBody>
-      </p:sp>
-      <p:sp>
-        <p:nvSpPr>
-          <p:cNvPr id="11" name="Rounded Rectangle 10"/>
-          <p:cNvSpPr/>
-          <p:nvPr/>
-        </p:nvSpPr>
-        <p:spPr>
-          <a:xfrm>
-            <a:off x="10698480" y="1554480"/>
-            <a:ext cx="1005840" cy="731520"/>
-          </a:xfrm>
-          <a:prstGeom prst="roundRect">
-            <a:avLst/>
-          </a:prstGeom>
-          <a:solidFill>
-            <a:srgbClr val="E2EFDA"/>
-          </a:solidFill>
-          <a:ln>
-            <a:solidFill>
-              <a:srgbClr val="4472C4"/>
-            </a:solidFill>
-          </a:ln>
-        </p:spPr>
-        <p:style>
-          <a:lnRef idx="1">
-            <a:schemeClr val="accent1"/>
-          </a:lnRef>
-          <a:fillRef idx="3">
-            <a:schemeClr val="accent1"/>
-          </a:fillRef>
-          <a:effectRef idx="2">
-            <a:schemeClr val="accent1"/>
-          </a:effectRef>
-          <a:fontRef idx="minor">
-            <a:schemeClr val="lt1"/>
-          </a:fontRef>
-        </p:style>
-        <p:txBody>
-          <a:bodyPr rtlCol="0" anchor="ctr" wrap="square"/>
-          <a:lstStyle/>
-          <a:p>
-            <a:pPr algn="ctr"/>
-            <a:r>
-              <a:rPr sz="1100" b="1">
-                <a:solidFill>
-                  <a:srgbClr val="1F374E"/>
-                </a:solidFill>
-              </a:rPr>
-              <a:t>Server</a:t>
-            </a:r>
-          </a:p>
-        </p:txBody>
-      </p:sp>
-      <p:sp>
-        <p:nvSpPr>
-          <p:cNvPr id="12" name="TextBox 11"/>
+              <a:t>www.example.org
+      ↓ DNS
+93.184.216.34</a:t>
+            </a:r>
+          </a:p>
+        </p:txBody>
+      </p:sp>
+      <p:sp>
+        <p:nvSpPr>
+          <p:cNvPr id="6" name="TextBox 5"/>
           <p:cNvSpPr txBox="1"/>
           <p:nvPr/>
         </p:nvSpPr>
         <p:spPr>
           <a:xfrm>
-            <a:off x="502920" y="6510528"/>
-            <a:ext cx="11064240" cy="182880"/>
+            <a:off x="365760" y="6510528"/>
+            <a:ext cx="11430000" cy="228600"/>
           </a:xfrm>
           <a:prstGeom prst="rect">
             <a:avLst/>
@@ -8474,7 +5380,7 @@
             <a:r>
               <a:rPr sz="800">
                 <a:solidFill>
-                  <a:srgbClr val="646464"/>
+                  <a:srgbClr val="6E6E6E"/>
                 </a:solidFill>
               </a:rPr>
               <a:t>Grafik: eigene Darstellung</a:t>
@@ -8509,13 +5415,13 @@
         <p:spPr>
           <a:xfrm>
             <a:off x="0" y="0"/>
-            <a:ext cx="12191695" cy="100584"/>
+            <a:ext cx="12191695" cy="109728"/>
           </a:xfrm>
           <a:prstGeom prst="rect">
             <a:avLst/>
           </a:prstGeom>
           <a:solidFill>
-            <a:srgbClr val="4472C4"/>
+            <a:srgbClr val="305396"/>
           </a:solidFill>
           <a:ln>
             <a:noFill/>
@@ -8552,7 +5458,7 @@
         <p:spPr>
           <a:xfrm>
             <a:off x="594360" y="320040"/>
-            <a:ext cx="10972800" cy="502920"/>
+            <a:ext cx="10972800" cy="548640"/>
           </a:xfrm>
           <a:prstGeom prst="rect">
             <a:avLst/>
@@ -8568,10 +5474,10 @@
             <a:r>
               <a:rPr sz="2600" b="1">
                 <a:solidFill>
-                  <a:srgbClr val="1F374E"/>
+                  <a:srgbClr val="202C3C"/>
                 </a:solidFill>
               </a:rPr>
-              <a:t>IP-Adresse und DNS</a:t>
+              <a:t>Protokolle und Dienste</a:t>
             </a:r>
           </a:p>
         </p:txBody>
@@ -8585,7 +5491,7 @@
         <p:spPr>
           <a:xfrm>
             <a:off x="685800" y="1234440"/>
-            <a:ext cx="5303520" cy="4937760"/>
+            <a:ext cx="5394960" cy="5029200"/>
           </a:xfrm>
           <a:prstGeom prst="rect">
             <a:avLst/>
@@ -8600,46 +5506,76 @@
           <a:p>
             <a:pPr>
               <a:spcAft>
-                <a:spcPts val="800"/>
+                <a:spcPts val="700"/>
               </a:spcAft>
               <a:defRPr sz="1900">
                 <a:solidFill>
-                  <a:srgbClr val="232323"/>
+                  <a:srgbClr val="1E1E1E"/>
                 </a:solidFill>
               </a:defRPr>
             </a:pPr>
             <a:r>
-              <a:t>IP = Internet Protocol; eine IP-Adresse dient der Adressierung im Netzwerk.</a:t>
+              <a:t>Protokoll = Regeln der Kommunikation</a:t>
             </a:r>
           </a:p>
           <a:p>
             <a:pPr>
               <a:spcAft>
-                <a:spcPts val="800"/>
+                <a:spcPts val="700"/>
               </a:spcAft>
               <a:defRPr sz="1900">
                 <a:solidFill>
-                  <a:srgbClr val="232323"/>
+                  <a:srgbClr val="1E1E1E"/>
                 </a:solidFill>
               </a:defRPr>
             </a:pPr>
             <a:r>
-              <a:t>DNS = Domain Name System.</a:t>
+              <a:t>HTTP/HTTPS: Webseiten</a:t>
             </a:r>
           </a:p>
           <a:p>
             <a:pPr>
               <a:spcAft>
-                <a:spcPts val="800"/>
+                <a:spcPts val="700"/>
               </a:spcAft>
               <a:defRPr sz="1900">
                 <a:solidFill>
-                  <a:srgbClr val="232323"/>
+                  <a:srgbClr val="1E1E1E"/>
                 </a:solidFill>
               </a:defRPr>
             </a:pPr>
             <a:r>
-              <a:t>DNS hilft, Namen wie www.example.org passenden IP-Adressen zuzuordnen.</a:t>
+              <a:t>SMTP/IMAP: E-Mail</a:t>
+            </a:r>
+          </a:p>
+          <a:p>
+            <a:pPr>
+              <a:spcAft>
+                <a:spcPts val="700"/>
+              </a:spcAft>
+              <a:defRPr sz="1900">
+                <a:solidFill>
+                  <a:srgbClr val="1E1E1E"/>
+                </a:solidFill>
+              </a:defRPr>
+            </a:pPr>
+            <a:r>
+              <a:t>SFTP: Dateiübertragung über geschützte Verbindung</a:t>
+            </a:r>
+          </a:p>
+          <a:p>
+            <a:pPr>
+              <a:spcAft>
+                <a:spcPts val="700"/>
+              </a:spcAft>
+              <a:defRPr sz="1900">
+                <a:solidFill>
+                  <a:srgbClr val="1E1E1E"/>
+                </a:solidFill>
+              </a:defRPr>
+            </a:pPr>
+            <a:r>
+              <a:t>Dienst, Programm und Gerät unterscheiden.</a:t>
             </a:r>
           </a:p>
         </p:txBody>
@@ -8652,18 +5588,18 @@
         </p:nvSpPr>
         <p:spPr>
           <a:xfrm>
-            <a:off x="6492240" y="1508760"/>
-            <a:ext cx="4480560" cy="2286000"/>
+            <a:off x="6126480" y="1188720"/>
+            <a:ext cx="5303520" cy="3840480"/>
           </a:xfrm>
           <a:prstGeom prst="rect">
             <a:avLst/>
           </a:prstGeom>
           <a:solidFill>
-            <a:srgbClr val="FAFAFA"/>
+            <a:srgbClr val="FCFCFC"/>
           </a:solidFill>
           <a:ln>
             <a:solidFill>
-              <a:srgbClr val="646464"/>
+              <a:srgbClr val="6E6E6E"/>
             </a:solidFill>
           </a:ln>
         </p:spPr>
@@ -8687,15 +5623,17 @@
           <a:p>
             <a:pPr algn="ctr"/>
             <a:r>
-              <a:rPr sz="1800">
-                <a:solidFill>
-                  <a:srgbClr val="232323"/>
+              <a:rPr sz="1200">
+                <a:solidFill>
+                  <a:srgbClr val="1E1E1E"/>
                 </a:solidFill>
                 <a:latin typeface="Consolas"/>
               </a:rPr>
-              <a:t>www.example.org
-        ↓  DNS
-93.184.216.34</a:t>
+              <a:t>HTTP = Hypertext Transfer Protocol
+HTTPS = ... Secure
+SMTP = Simple Mail Transfer Protocol
+IMAP = Internet Message Access Protocol
+SFTP = SSH File Transfer Protocol</a:t>
             </a:r>
           </a:p>
         </p:txBody>
@@ -8708,8 +5646,8 @@
         </p:nvSpPr>
         <p:spPr>
           <a:xfrm>
-            <a:off x="502920" y="6510528"/>
-            <a:ext cx="11064240" cy="182880"/>
+            <a:off x="365760" y="6510528"/>
+            <a:ext cx="11430000" cy="228600"/>
           </a:xfrm>
           <a:prstGeom prst="rect">
             <a:avLst/>
@@ -8726,7 +5664,7 @@
             <a:r>
               <a:rPr sz="800">
                 <a:solidFill>
-                  <a:srgbClr val="646464"/>
+                  <a:srgbClr val="6E6E6E"/>
                 </a:solidFill>
               </a:rPr>
               <a:t>Grafik: eigene Darstellung</a:t>
@@ -8761,13 +5699,13 @@
         <p:spPr>
           <a:xfrm>
             <a:off x="0" y="0"/>
-            <a:ext cx="12191695" cy="100584"/>
+            <a:ext cx="12191695" cy="109728"/>
           </a:xfrm>
           <a:prstGeom prst="rect">
             <a:avLst/>
           </a:prstGeom>
           <a:solidFill>
-            <a:srgbClr val="4472C4"/>
+            <a:srgbClr val="305396"/>
           </a:solidFill>
           <a:ln>
             <a:noFill/>
@@ -8804,7 +5742,7 @@
         <p:spPr>
           <a:xfrm>
             <a:off x="594360" y="320040"/>
-            <a:ext cx="10972800" cy="502920"/>
+            <a:ext cx="10972800" cy="548640"/>
           </a:xfrm>
           <a:prstGeom prst="rect">
             <a:avLst/>
@@ -8820,10 +5758,10 @@
             <a:r>
               <a:rPr sz="2600" b="1">
                 <a:solidFill>
-                  <a:srgbClr val="1F374E"/>
+                  <a:srgbClr val="202C3C"/>
                 </a:solidFill>
               </a:rPr>
-              <a:t>Übertragungsmedien</a:t>
+              <a:t>Datenwege untersuchen</a:t>
             </a:r>
           </a:p>
         </p:txBody>
@@ -8837,7 +5775,7 @@
         <p:spPr>
           <a:xfrm>
             <a:off x="685800" y="1234440"/>
-            <a:ext cx="5303520" cy="4937760"/>
+            <a:ext cx="5394960" cy="5029200"/>
           </a:xfrm>
           <a:prstGeom prst="rect">
             <a:avLst/>
@@ -8852,85 +5790,100 @@
           <a:p>
             <a:pPr>
               <a:spcAft>
-                <a:spcPts val="800"/>
+                <a:spcPts val="700"/>
               </a:spcAft>
               <a:defRPr sz="1900">
                 <a:solidFill>
-                  <a:srgbClr val="232323"/>
+                  <a:srgbClr val="1E1E1E"/>
                 </a:solidFill>
               </a:defRPr>
             </a:pPr>
             <a:r>
-              <a:t>Kupferkabel: elektrische Signale</a:t>
+              <a:t>Kabel eingesteckt oder WLAN verbunden?</a:t>
             </a:r>
           </a:p>
           <a:p>
             <a:pPr>
               <a:spcAft>
-                <a:spcPts val="800"/>
+                <a:spcPts val="700"/>
               </a:spcAft>
               <a:defRPr sz="1900">
                 <a:solidFill>
-                  <a:srgbClr val="232323"/>
+                  <a:srgbClr val="1E1E1E"/>
                 </a:solidFill>
               </a:defRPr>
             </a:pPr>
             <a:r>
-              <a:t>Glasfaser: Lichtsignale</a:t>
+              <a:t>lokales Netz erreichbar?</a:t>
             </a:r>
           </a:p>
           <a:p>
             <a:pPr>
               <a:spcAft>
-                <a:spcPts val="800"/>
+                <a:spcPts val="700"/>
               </a:spcAft>
               <a:defRPr sz="1900">
                 <a:solidFill>
-                  <a:srgbClr val="232323"/>
+                  <a:srgbClr val="1E1E1E"/>
                 </a:solidFill>
               </a:defRPr>
             </a:pPr>
             <a:r>
-              <a:t>Funk/WLAN: drahtlose Übertragung</a:t>
+              <a:t>vorgegebenes Ziel mit ping prüfen</a:t>
             </a:r>
           </a:p>
           <a:p>
             <a:pPr>
               <a:spcAft>
-                <a:spcPts val="800"/>
+                <a:spcPts val="700"/>
               </a:spcAft>
               <a:defRPr sz="1900">
                 <a:solidFill>
-                  <a:srgbClr val="232323"/>
+                  <a:srgbClr val="1E1E1E"/>
                 </a:solidFill>
               </a:defRPr>
             </a:pPr>
             <a:r>
-              <a:t>Die Auswahl hängt z. B. von Reichweite, Mobilität und Umgebung ab.</a:t>
-            </a:r>
-          </a:p>
-        </p:txBody>
-      </p:sp>
-      <p:sp>
-        <p:nvSpPr>
-          <p:cNvPr id="5" name="Rounded Rectangle 4"/>
+              <a:t>funktioniert eine andere Webseite?</a:t>
+            </a:r>
+          </a:p>
+          <a:p>
+            <a:pPr>
+              <a:spcAft>
+                <a:spcPts val="700"/>
+              </a:spcAft>
+              <a:defRPr sz="1900">
+                <a:solidFill>
+                  <a:srgbClr val="1E1E1E"/>
+                </a:solidFill>
+              </a:defRPr>
+            </a:pPr>
+            <a:r>
+              <a:t>DNS oder Dienst als Fehlerstelle prüfen</a:t>
+            </a:r>
+          </a:p>
+        </p:txBody>
+      </p:sp>
+      <p:sp>
+        <p:nvSpPr>
+          <p:cNvPr id="5" name="Rectangle 4"/>
           <p:cNvSpPr/>
           <p:nvPr/>
         </p:nvSpPr>
         <p:spPr>
           <a:xfrm>
-            <a:off x="6583680" y="1371600"/>
-            <a:ext cx="4114800" cy="685800"/>
-          </a:xfrm>
-          <a:prstGeom prst="roundRect">
+            <a:off x="6492240" y="1645920"/>
+            <a:ext cx="4572000" cy="2377440"/>
+          </a:xfrm>
+          <a:prstGeom prst="rect">
             <a:avLst/>
           </a:prstGeom>
           <a:solidFill>
-            <a:srgbClr val="F2F6FA"/>
+            <a:srgbClr val="FCFCFC"/>
           </a:solidFill>
           <a:ln>
             <a:solidFill>
-              <a:srgbClr val="4472C4"/>
+              <a:srgbClr val="6E6E6E"/>
             </a:solidFill>
           </a:ln>
         </p:spPr>
@@ -8949,137 +5902,34 @@
           </a:fontRef>
         </p:style>
         <p:txBody>
-          <a:bodyPr rtlCol="0" anchor="ctr" wrap="square"/>
+          <a:bodyPr rtlCol="0" anchor="ctr" wrap="none"/>
           <a:lstStyle/>
           <a:p>
             <a:pPr algn="ctr"/>
             <a:r>
-              <a:rPr sz="1600" b="1">
-                <a:solidFill>
-                  <a:srgbClr val="1F374E"/>
-                </a:solidFill>
+              <a:rPr sz="1500">
+                <a:solidFill>
+                  <a:srgbClr val="1E1E1E"/>
+                </a:solidFill>
+                <a:latin typeface="Consolas"/>
               </a:rPr>
-              <a:t>Kupferkabel</a:t>
-            </a:r>
-          </a:p>
-        </p:txBody>
-      </p:sp>
-      <p:sp>
-        <p:nvSpPr>
-          <p:cNvPr id="6" name="Rounded Rectangle 5"/>
-          <p:cNvSpPr/>
-          <p:nvPr/>
-        </p:nvSpPr>
-        <p:spPr>
-          <a:xfrm>
-            <a:off x="6583680" y="2377440"/>
-            <a:ext cx="4114800" cy="685800"/>
-          </a:xfrm>
-          <a:prstGeom prst="roundRect">
-            <a:avLst/>
-          </a:prstGeom>
-          <a:solidFill>
-            <a:srgbClr val="FFE699"/>
-          </a:solidFill>
-          <a:ln>
-            <a:solidFill>
-              <a:srgbClr val="4472C4"/>
-            </a:solidFill>
-          </a:ln>
-        </p:spPr>
-        <p:style>
-          <a:lnRef idx="1">
-            <a:schemeClr val="accent1"/>
-          </a:lnRef>
-          <a:fillRef idx="3">
-            <a:schemeClr val="accent1"/>
-          </a:fillRef>
-          <a:effectRef idx="2">
-            <a:schemeClr val="accent1"/>
-          </a:effectRef>
-          <a:fontRef idx="minor">
-            <a:schemeClr val="lt1"/>
-          </a:fontRef>
-        </p:style>
-        <p:txBody>
-          <a:bodyPr rtlCol="0" anchor="ctr" wrap="square"/>
-          <a:lstStyle/>
-          <a:p>
-            <a:pPr algn="ctr"/>
-            <a:r>
-              <a:rPr sz="1600" b="1">
-                <a:solidFill>
-                  <a:srgbClr val="1F374E"/>
-                </a:solidFill>
-              </a:rPr>
-              <a:t>Glasfaser</a:t>
-            </a:r>
-          </a:p>
-        </p:txBody>
-      </p:sp>
-      <p:sp>
-        <p:nvSpPr>
-          <p:cNvPr id="7" name="Rounded Rectangle 6"/>
-          <p:cNvSpPr/>
-          <p:nvPr/>
-        </p:nvSpPr>
-        <p:spPr>
-          <a:xfrm>
-            <a:off x="6583680" y="3383280"/>
-            <a:ext cx="4114800" cy="685800"/>
-          </a:xfrm>
-          <a:prstGeom prst="roundRect">
-            <a:avLst/>
-          </a:prstGeom>
-          <a:solidFill>
-            <a:srgbClr val="DCE6F1"/>
-          </a:solidFill>
-          <a:ln>
-            <a:solidFill>
-              <a:srgbClr val="4472C4"/>
-            </a:solidFill>
-          </a:ln>
-        </p:spPr>
-        <p:style>
-          <a:lnRef idx="1">
-            <a:schemeClr val="accent1"/>
-          </a:lnRef>
-          <a:fillRef idx="3">
-            <a:schemeClr val="accent1"/>
-          </a:fillRef>
-          <a:effectRef idx="2">
-            <a:schemeClr val="accent1"/>
-          </a:effectRef>
-          <a:fontRef idx="minor">
-            <a:schemeClr val="lt1"/>
-          </a:fontRef>
-        </p:style>
-        <p:txBody>
-          <a:bodyPr rtlCol="0" anchor="ctr" wrap="square"/>
-          <a:lstStyle/>
-          <a:p>
-            <a:pPr algn="ctr"/>
-            <a:r>
-              <a:rPr sz="1600" b="1">
-                <a:solidFill>
-                  <a:srgbClr val="1F374E"/>
-                </a:solidFill>
-              </a:rPr>
-              <a:t>Funk / WLAN</a:t>
-            </a:r>
-          </a:p>
-        </p:txBody>
-      </p:sp>
-      <p:sp>
-        <p:nvSpPr>
-          <p:cNvPr id="8" name="TextBox 7"/>
+              <a:t>Beispiel:
+ping 192.168.1.1
+Nur vorgegebene Testziele nutzen.</a:t>
+            </a:r>
+          </a:p>
+        </p:txBody>
+      </p:sp>
+      <p:sp>
+        <p:nvSpPr>
+          <p:cNvPr id="6" name="TextBox 5"/>
           <p:cNvSpPr txBox="1"/>
           <p:nvPr/>
         </p:nvSpPr>
         <p:spPr>
           <a:xfrm>
-            <a:off x="502920" y="6510528"/>
-            <a:ext cx="11064240" cy="182880"/>
+            <a:off x="365760" y="6510528"/>
+            <a:ext cx="11430000" cy="228600"/>
           </a:xfrm>
           <a:prstGeom prst="rect">
             <a:avLst/>
@@ -9096,7 +5946,7 @@
             <a:r>
               <a:rPr sz="800">
                 <a:solidFill>
-                  <a:srgbClr val="646464"/>
+                  <a:srgbClr val="6E6E6E"/>
                 </a:solidFill>
               </a:rPr>
               <a:t>Grafik: eigene Darstellung</a:t>
@@ -9131,13 +5981,13 @@
         <p:spPr>
           <a:xfrm>
             <a:off x="0" y="0"/>
-            <a:ext cx="12191695" cy="100584"/>
+            <a:ext cx="12191695" cy="109728"/>
           </a:xfrm>
           <a:prstGeom prst="rect">
             <a:avLst/>
           </a:prstGeom>
           <a:solidFill>
-            <a:srgbClr val="4472C4"/>
+            <a:srgbClr val="305396"/>
           </a:solidFill>
           <a:ln>
             <a:noFill/>
@@ -9174,7 +6024,7 @@
         <p:spPr>
           <a:xfrm>
             <a:off x="594360" y="320040"/>
-            <a:ext cx="10972800" cy="502920"/>
+            <a:ext cx="10972800" cy="548640"/>
           </a:xfrm>
           <a:prstGeom prst="rect">
             <a:avLst/>
@@ -9190,10 +6040,10 @@
             <a:r>
               <a:rPr sz="2600" b="1">
                 <a:solidFill>
-                  <a:srgbClr val="1F374E"/>
+                  <a:srgbClr val="202C3C"/>
                 </a:solidFill>
               </a:rPr>
-              <a:t>Was ist ein Protokoll?</a:t>
+              <a:t>Sicherung</a:t>
             </a:r>
           </a:p>
         </p:txBody>
@@ -9207,7 +6057,7 @@
         <p:spPr>
           <a:xfrm>
             <a:off x="685800" y="1234440"/>
-            <a:ext cx="5303520" cy="4937760"/>
+            <a:ext cx="5394960" cy="5029200"/>
           </a:xfrm>
           <a:prstGeom prst="rect">
             <a:avLst/>
@@ -9222,219 +6072,75 @@
           <a:p>
             <a:pPr>
               <a:spcAft>
-                <a:spcPts val="800"/>
+                <a:spcPts val="700"/>
               </a:spcAft>
               <a:defRPr sz="1900">
                 <a:solidFill>
-                  <a:srgbClr val="232323"/>
+                  <a:srgbClr val="1E1E1E"/>
                 </a:solidFill>
               </a:defRPr>
             </a:pPr>
             <a:r>
-              <a:t>Ein Protokoll legt Regeln für die Kommunikation fest.</a:t>
+              <a:t>Datenweg Endgerät → Server erklären</a:t>
             </a:r>
           </a:p>
           <a:p>
             <a:pPr>
               <a:spcAft>
-                <a:spcPts val="800"/>
+                <a:spcPts val="700"/>
               </a:spcAft>
               <a:defRPr sz="1900">
                 <a:solidFill>
-                  <a:srgbClr val="232323"/>
+                  <a:srgbClr val="1E1E1E"/>
                 </a:solidFill>
               </a:defRPr>
             </a:pPr>
             <a:r>
-              <a:t>Es beschreibt z. B., wie Nachrichten aufgebaut und ausgetauscht werden.</a:t>
+              <a:t>Router, Switch, Access Point unterscheiden</a:t>
             </a:r>
           </a:p>
           <a:p>
             <a:pPr>
               <a:spcAft>
-                <a:spcPts val="800"/>
+                <a:spcPts val="700"/>
               </a:spcAft>
               <a:defRPr sz="1900">
                 <a:solidFill>
-                  <a:srgbClr val="232323"/>
+                  <a:srgbClr val="1E1E1E"/>
                 </a:solidFill>
               </a:defRPr>
             </a:pPr>
             <a:r>
-              <a:t>Erst danach betrachten wir konkrete Protokolle.</a:t>
-            </a:r>
-          </a:p>
-        </p:txBody>
-      </p:sp>
-      <p:sp>
-        <p:nvSpPr>
-          <p:cNvPr id="5" name="Diamond 4"/>
-          <p:cNvSpPr/>
-          <p:nvPr/>
-        </p:nvSpPr>
-        <p:spPr>
-          <a:xfrm>
-            <a:off x="7680960" y="1280160"/>
-            <a:ext cx="2011680" cy="1280160"/>
-          </a:xfrm>
-          <a:prstGeom prst="diamond">
-            <a:avLst/>
-          </a:prstGeom>
-          <a:solidFill>
-            <a:srgbClr val="FFE699"/>
-          </a:solidFill>
-          <a:ln>
-            <a:solidFill>
-              <a:srgbClr val="4472C4"/>
-            </a:solidFill>
-          </a:ln>
-        </p:spPr>
-        <p:style>
-          <a:lnRef idx="1">
-            <a:schemeClr val="accent1"/>
-          </a:lnRef>
-          <a:fillRef idx="3">
-            <a:schemeClr val="accent1"/>
-          </a:fillRef>
-          <a:effectRef idx="2">
-            <a:schemeClr val="accent1"/>
-          </a:effectRef>
-          <a:fontRef idx="minor">
-            <a:schemeClr val="lt1"/>
-          </a:fontRef>
-        </p:style>
-        <p:txBody>
-          <a:bodyPr rtlCol="0" anchor="ctr"/>
-          <a:lstStyle/>
-          <a:p>
-            <a:pPr algn="ctr"/>
-            <a:r>
-              <a:t>Bedingung?</a:t>
-            </a:r>
-          </a:p>
-          <a:p>
-            <a:r>
-              <a:t>WAHR / FALSCH</a:t>
-            </a:r>
-          </a:p>
-        </p:txBody>
-      </p:sp>
-      <p:sp>
-        <p:nvSpPr>
-          <p:cNvPr id="6" name="Rounded Rectangle 5"/>
-          <p:cNvSpPr/>
-          <p:nvPr/>
-        </p:nvSpPr>
-        <p:spPr>
-          <a:xfrm>
-            <a:off x="6309360" y="3154680"/>
-            <a:ext cx="1920240" cy="640080"/>
-          </a:xfrm>
-          <a:prstGeom prst="roundRect">
-            <a:avLst/>
-          </a:prstGeom>
-          <a:solidFill>
-            <a:srgbClr val="E2EFDA"/>
-          </a:solidFill>
-          <a:ln>
-            <a:solidFill>
-              <a:srgbClr val="4472C4"/>
-            </a:solidFill>
-          </a:ln>
-        </p:spPr>
-        <p:style>
-          <a:lnRef idx="1">
-            <a:schemeClr val="accent1"/>
-          </a:lnRef>
-          <a:fillRef idx="3">
-            <a:schemeClr val="accent1"/>
-          </a:fillRef>
-          <a:effectRef idx="2">
-            <a:schemeClr val="accent1"/>
-          </a:effectRef>
-          <a:fontRef idx="minor">
-            <a:schemeClr val="lt1"/>
-          </a:fontRef>
-        </p:style>
-        <p:txBody>
-          <a:bodyPr rtlCol="0" anchor="ctr" wrap="square"/>
-          <a:lstStyle/>
-          <a:p>
-            <a:pPr algn="ctr"/>
-            <a:r>
-              <a:rPr sz="1500" b="1">
-                <a:solidFill>
-                  <a:srgbClr val="1F374E"/>
-                </a:solidFill>
-              </a:rPr>
-              <a:t>DANN</a:t>
-            </a:r>
-          </a:p>
-        </p:txBody>
-      </p:sp>
-      <p:sp>
-        <p:nvSpPr>
-          <p:cNvPr id="7" name="Rounded Rectangle 6"/>
-          <p:cNvSpPr/>
-          <p:nvPr/>
-        </p:nvSpPr>
-        <p:spPr>
-          <a:xfrm>
-            <a:off x="9418320" y="3154680"/>
-            <a:ext cx="1920240" cy="640080"/>
-          </a:xfrm>
-          <a:prstGeom prst="roundRect">
-            <a:avLst/>
-          </a:prstGeom>
-          <a:solidFill>
-            <a:srgbClr val="F8CBAD"/>
-          </a:solidFill>
-          <a:ln>
-            <a:solidFill>
-              <a:srgbClr val="4472C4"/>
-            </a:solidFill>
-          </a:ln>
-        </p:spPr>
-        <p:style>
-          <a:lnRef idx="1">
-            <a:schemeClr val="accent1"/>
-          </a:lnRef>
-          <a:fillRef idx="3">
-            <a:schemeClr val="accent1"/>
-          </a:fillRef>
-          <a:effectRef idx="2">
-            <a:schemeClr val="accent1"/>
-          </a:effectRef>
-          <a:fontRef idx="minor">
-            <a:schemeClr val="lt1"/>
-          </a:fontRef>
-        </p:style>
-        <p:txBody>
-          <a:bodyPr rtlCol="0" anchor="ctr" wrap="square"/>
-          <a:lstStyle/>
-          <a:p>
-            <a:pPr algn="ctr"/>
-            <a:r>
-              <a:rPr sz="1500" b="1">
-                <a:solidFill>
-                  <a:srgbClr val="1F374E"/>
-                </a:solidFill>
-              </a:rPr>
-              <a:t>SONST</a:t>
-            </a:r>
-          </a:p>
-        </p:txBody>
-      </p:sp>
-      <p:sp>
-        <p:nvSpPr>
-          <p:cNvPr id="8" name="TextBox 7"/>
+              <a:t>IP-Adresse und DNS erklären</a:t>
+            </a:r>
+          </a:p>
+          <a:p>
+            <a:pPr>
+              <a:spcAft>
+                <a:spcPts val="700"/>
+              </a:spcAft>
+              <a:defRPr sz="1900">
+                <a:solidFill>
+                  <a:srgbClr val="1E1E1E"/>
+                </a:solidFill>
+              </a:defRPr>
+            </a:pPr>
+            <a:r>
+              <a:t>Protokoll und Netzwerkdienst unterscheiden</a:t>
+            </a:r>
+          </a:p>
+        </p:txBody>
+      </p:sp>
+      <p:sp>
+        <p:nvSpPr>
+          <p:cNvPr id="5" name="TextBox 4"/>
           <p:cNvSpPr txBox="1"/>
           <p:nvPr/>
         </p:nvSpPr>
         <p:spPr>
           <a:xfrm>
-            <a:off x="502920" y="6510528"/>
-            <a:ext cx="11064240" cy="182880"/>
+            <a:off x="365760" y="6510528"/>
+            <a:ext cx="11430000" cy="228600"/>
           </a:xfrm>
           <a:prstGeom prst="rect">
             <a:avLst/>
@@ -9451,7 +6157,7 @@
             <a:r>
               <a:rPr sz="800">
                 <a:solidFill>
-                  <a:srgbClr val="646464"/>
+                  <a:srgbClr val="6E6E6E"/>
                 </a:solidFill>
               </a:rPr>
               <a:t>Grafik: eigene Darstellung</a:t>
@@ -9486,13 +6192,13 @@
         <p:spPr>
           <a:xfrm>
             <a:off x="0" y="0"/>
-            <a:ext cx="12191695" cy="100584"/>
+            <a:ext cx="12191695" cy="109728"/>
           </a:xfrm>
           <a:prstGeom prst="rect">
             <a:avLst/>
           </a:prstGeom>
           <a:solidFill>
-            <a:srgbClr val="4472C4"/>
+            <a:srgbClr val="305396"/>
           </a:solidFill>
           <a:ln>
             <a:noFill/>
@@ -9529,7 +6235,7 @@
         <p:spPr>
           <a:xfrm>
             <a:off x="594360" y="320040"/>
-            <a:ext cx="10972800" cy="502920"/>
+            <a:ext cx="10972800" cy="548640"/>
           </a:xfrm>
           <a:prstGeom prst="rect">
             <a:avLst/>
@@ -9545,10 +6251,10 @@
             <a:r>
               <a:rPr sz="2600" b="1">
                 <a:solidFill>
-                  <a:srgbClr val="1F374E"/>
+                  <a:srgbClr val="202C3C"/>
                 </a:solidFill>
               </a:rPr>
-              <a:t>Wichtige Protokolle – ausgeschrieben</a:t>
+              <a:t>Quellen</a:t>
             </a:r>
           </a:p>
         </p:txBody>
@@ -9562,7 +6268,7 @@
         <p:spPr>
           <a:xfrm>
             <a:off x="685800" y="1234440"/>
-            <a:ext cx="5303520" cy="4937760"/>
+            <a:ext cx="5394960" cy="5029200"/>
           </a:xfrm>
           <a:prstGeom prst="rect">
             <a:avLst/>
@@ -9577,147 +6283,45 @@
           <a:p>
             <a:pPr>
               <a:spcAft>
-                <a:spcPts val="800"/>
+                <a:spcPts val="700"/>
               </a:spcAft>
               <a:defRPr sz="1900">
                 <a:solidFill>
-                  <a:srgbClr val="232323"/>
+                  <a:srgbClr val="1E1E1E"/>
                 </a:solidFill>
               </a:defRPr>
             </a:pPr>
             <a:r>
-              <a:t>HTTP = Hypertext Transfer Protocol → Webseiten übertragen</a:t>
+              <a:t>Sächsischer Lehrplan Oberschule Informatik, Klassenstufe 8: https://www.schulportal.sachsen.de/lplandb/lehrplan/514</a:t>
             </a:r>
           </a:p>
           <a:p>
             <a:pPr>
               <a:spcAft>
-                <a:spcPts val="800"/>
+                <a:spcPts val="700"/>
               </a:spcAft>
               <a:defRPr sz="1900">
                 <a:solidFill>
-                  <a:srgbClr val="232323"/>
+                  <a:srgbClr val="1E1E1E"/>
                 </a:solidFill>
               </a:defRPr>
             </a:pPr>
             <a:r>
-              <a:t>HTTPS = Hypertext Transfer Protocol Secure → Webseiten geschützt übertragen</a:t>
-            </a:r>
-          </a:p>
-          <a:p>
-            <a:pPr>
-              <a:spcAft>
-                <a:spcPts val="800"/>
-              </a:spcAft>
-              <a:defRPr sz="1900">
-                <a:solidFill>
-                  <a:srgbClr val="232323"/>
-                </a:solidFill>
-              </a:defRPr>
-            </a:pPr>
-            <a:r>
-              <a:t>SMTP = Simple Mail Transfer Protocol → E-Mails versenden</a:t>
-            </a:r>
-          </a:p>
-          <a:p>
-            <a:pPr>
-              <a:spcAft>
-                <a:spcPts val="800"/>
-              </a:spcAft>
-              <a:defRPr sz="1900">
-                <a:solidFill>
-                  <a:srgbClr val="232323"/>
-                </a:solidFill>
-              </a:defRPr>
-            </a:pPr>
-            <a:r>
-              <a:t>IMAP = Internet Message Access Protocol → E-Mails auf dem Server abrufen/verwalten</a:t>
-            </a:r>
-          </a:p>
-          <a:p>
-            <a:pPr>
-              <a:spcAft>
-                <a:spcPts val="800"/>
-              </a:spcAft>
-              <a:defRPr sz="1900">
-                <a:solidFill>
-                  <a:srgbClr val="232323"/>
-                </a:solidFill>
-              </a:defRPr>
-            </a:pPr>
-            <a:r>
-              <a:t>SFTP = SSH File Transfer Protocol → Dateien über eine geschützte Verbindung übertragen</a:t>
-            </a:r>
-          </a:p>
-        </p:txBody>
-      </p:sp>
-      <p:sp>
-        <p:nvSpPr>
-          <p:cNvPr id="5" name="Rectangle 4"/>
-          <p:cNvSpPr/>
-          <p:nvPr/>
-        </p:nvSpPr>
-        <p:spPr>
-          <a:xfrm>
-            <a:off x="6400800" y="1508760"/>
-            <a:ext cx="4754880" cy="3017520"/>
-          </a:xfrm>
-          <a:prstGeom prst="rect">
-            <a:avLst/>
-          </a:prstGeom>
-          <a:solidFill>
-            <a:srgbClr val="FAFAFA"/>
-          </a:solidFill>
-          <a:ln>
-            <a:solidFill>
-              <a:srgbClr val="646464"/>
-            </a:solidFill>
-          </a:ln>
-        </p:spPr>
-        <p:style>
-          <a:lnRef idx="1">
-            <a:schemeClr val="accent1"/>
-          </a:lnRef>
-          <a:fillRef idx="3">
-            <a:schemeClr val="accent1"/>
-          </a:fillRef>
-          <a:effectRef idx="2">
-            <a:schemeClr val="accent1"/>
-          </a:effectRef>
-          <a:fontRef idx="minor">
-            <a:schemeClr val="lt1"/>
-          </a:fontRef>
-        </p:style>
-        <p:txBody>
-          <a:bodyPr rtlCol="0" anchor="ctr" wrap="none"/>
-          <a:lstStyle/>
-          <a:p>
-            <a:pPr algn="ctr"/>
-            <a:r>
-              <a:rPr sz="1400">
-                <a:solidFill>
-                  <a:srgbClr val="232323"/>
-                </a:solidFill>
-                <a:latin typeface="Consolas"/>
-              </a:rPr>
-              <a:t>Webseite öffnen  → HTTP / HTTPS
-E-Mail senden    → SMTP
-E-Mail abrufen   → IMAP
-Datei übertragen → SFTP</a:t>
-            </a:r>
-          </a:p>
-        </p:txBody>
-      </p:sp>
-      <p:sp>
-        <p:nvSpPr>
-          <p:cNvPr id="6" name="TextBox 5"/>
+              <a:t>Diagnosebeispiele und Grafiken: eigene Darstellung.</a:t>
+            </a:r>
+          </a:p>
+        </p:txBody>
+      </p:sp>
+      <p:sp>
+        <p:nvSpPr>
+          <p:cNvPr id="5" name="TextBox 4"/>
           <p:cNvSpPr txBox="1"/>
           <p:nvPr/>
         </p:nvSpPr>
         <p:spPr>
           <a:xfrm>
-            <a:off x="502920" y="6510528"/>
-            <a:ext cx="11064240" cy="182880"/>
+            <a:off x="365760" y="6510528"/>
+            <a:ext cx="11430000" cy="228600"/>
           </a:xfrm>
           <a:prstGeom prst="rect">
             <a:avLst/>
@@ -9734,10 +6338,10 @@
             <a:r>
               <a:rPr sz="800">
                 <a:solidFill>
-                  <a:srgbClr val="646464"/>
+                  <a:srgbClr val="6E6E6E"/>
                 </a:solidFill>
               </a:rPr>
-              <a:t>Grafik: eigene Darstellung</a:t>
+              <a:t>Quellenangaben · Grafiken: eigene Darstellung</a:t>
             </a:r>
           </a:p>
         </p:txBody>
